--- a/Topic_D/Exam_Practice/TD-L05_Speaking_Workshop_Training_Qualifications_and_Skills.pptx
+++ b/Topic_D/Exam_Practice/TD-L05_Speaking_Workshop_Training_Qualifications_and_Skills.pptx
@@ -615,7 +615,11 @@
           <a:lstStyle/>
           <a:p>
             <a:r>
-              <a:rPr lang="en-US" dirty="0"/>
+              <a:rPr lang="ar-SA" dirty="0">
+                <a:latin typeface="Amiri" pitchFamily="2" charset="-78"/>
+                <a:ea typeface="Amiri" pitchFamily="2" charset="-78"/>
+                <a:cs typeface="Amiri" pitchFamily="2" charset="-78"/>
+              </a:rPr>
               <a:t>ROLE PLAY C (Develop) — a volunteering interview.
 SET-UP IN THE BREAKOUT ROOM: A = examiner (reads the left column ONLY — the questions, in order), B = candidate (sees the task column; Core may use the help column), C = observer (ticks the feedback checklist). 1 minute preparation, about 3 minutes speaking, 1 minute feedback, then rotate.
 Task ! is the unexpected question: in the exam the candidate has not seen it — the examiner should read it without warning.
@@ -707,7 +711,11 @@
           <a:lstStyle/>
           <a:p>
             <a:r>
-              <a:rPr lang="en-US" dirty="0"/>
+              <a:rPr lang="ar-SA" dirty="0">
+                <a:latin typeface="Amiri" pitchFamily="2" charset="-78"/>
+                <a:ea typeface="Amiri" pitchFamily="2" charset="-78"/>
+                <a:cs typeface="Amiri" pitchFamily="2" charset="-78"/>
+              </a:rPr>
               <a:t>ROLE PLAY D (Stretch) — a radio debate.
 SET-UP IN THE BREAKOUT ROOM: A = examiner (reads the left column ONLY — the questions, in order), B = candidate (sees the task column; Core may use the help column), C = observer (ticks the feedback checklist). 1 minute preparation, about 3 minutes speaking, 1 minute feedback, then rotate.
 Task ! is the unexpected question: in the exam the candidate has not seen it — the examiner should read it without warning.
@@ -1243,7 +1251,11 @@
           <a:lstStyle/>
           <a:p>
             <a:r>
-              <a:rPr lang="en-US" dirty="0"/>
+              <a:rPr lang="ar-SA" dirty="0">
+                <a:latin typeface="Amiri" pitchFamily="2" charset="-78"/>
+                <a:ea typeface="Amiri" pitchFamily="2" charset="-78"/>
+                <a:cs typeface="Amiri" pitchFamily="2" charset="-78"/>
+              </a:rPr>
               <a:t>TOPIC CONVERSATION — Core. Examiner asks the questions in order and may add “لِمَاذَا؟ / هَلْ يُمْكِنُ أَنْ تَشْرَحَ أَكْثَرَ؟” to push for more. Candidate aims for one full sentence per question.
 </a:t>
             </a:r>
@@ -1332,7 +1344,11 @@
           <a:lstStyle/>
           <a:p>
             <a:r>
-              <a:rPr lang="en-US" dirty="0"/>
+              <a:rPr lang="ar-SA" dirty="0">
+                <a:latin typeface="Amiri" pitchFamily="2" charset="-78"/>
+                <a:ea typeface="Amiri" pitchFamily="2" charset="-78"/>
+                <a:cs typeface="Amiri" pitchFamily="2" charset="-78"/>
+              </a:rPr>
               <a:t>TOPIC CONVERSATION — Develop. Examiner asks the questions in order and may add “لِمَاذَا؟ / هَلْ يُمْكِنُ أَنْ تَشْرَحَ أَكْثَرَ؟” to push for more. Candidate aims for two or three sentences, with a verbal noun and a relative clause.
 </a:t>
             </a:r>
@@ -1421,7 +1437,11 @@
           <a:lstStyle/>
           <a:p>
             <a:r>
-              <a:rPr lang="en-US" dirty="0"/>
+              <a:rPr lang="ar-SA" dirty="0">
+                <a:latin typeface="Amiri" pitchFamily="2" charset="-78"/>
+                <a:ea typeface="Amiri" pitchFamily="2" charset="-78"/>
+                <a:cs typeface="Amiri" pitchFamily="2" charset="-78"/>
+              </a:rPr>
               <a:t>TOPIC CONVERSATION — Stretch. Examiner asks the questions in order and may add “لِمَاذَا؟ / هَلْ يُمْكِنُ أَنْ تَشْرَحَ أَكْثَرَ؟” to push for more. Candidate aims for a developed answer: opinion, balance, concession and a conditional.
 </a:t>
             </a:r>
@@ -1510,7 +1530,11 @@
           <a:lstStyle/>
           <a:p>
             <a:r>
-              <a:rPr lang="en-US" dirty="0"/>
+              <a:rPr lang="ar-SA" dirty="0">
+                <a:latin typeface="Amiri" pitchFamily="2" charset="-78"/>
+                <a:ea typeface="Amiri" pitchFamily="2" charset="-78"/>
+                <a:cs typeface="Amiri" pitchFamily="2" charset="-78"/>
+              </a:rPr>
               <a:t>WELCOME (1 min) — while students join.
 • Greet each student by name as they arrive: السَّلَامُ عَلَيْكُمْ. Take the register (Pastoral Tracker: attendance 0/1).
 • 2-MINUTE CHECK-IN (SEND training): a private chat to any student who seemed unsettled last lesson — “Are you okay today? 👍 / 👎”.
@@ -2224,7 +2248,11 @@
           <a:lstStyle/>
           <a:p>
             <a:r>
-              <a:rPr lang="en-US" dirty="0"/>
+              <a:rPr lang="ar-SA" dirty="0">
+                <a:latin typeface="Amiri" pitchFamily="2" charset="-78"/>
+                <a:ea typeface="Amiri" pitchFamily="2" charset="-78"/>
+                <a:cs typeface="Amiri" pitchFamily="2" charset="-78"/>
+              </a:rPr>
               <a:t>TEACH (3 min). Role play = precise and complete; conversation = develop. Choral repetition of the repair phrases. To a girl: تُعِيدِي.</a:t>
             </a:r>
             <a:endParaRPr lang="en-US" dirty="0"/>
@@ -2312,7 +2340,11 @@
           <a:lstStyle/>
           <a:p>
             <a:r>
-              <a:rPr lang="en-US" dirty="0"/>
+              <a:rPr lang="ar-SA" dirty="0">
+                <a:latin typeface="Amiri" pitchFamily="2" charset="-78"/>
+                <a:ea typeface="Amiri" pitchFamily="2" charset="-78"/>
+                <a:cs typeface="Amiri" pitchFamily="2" charset="-78"/>
+              </a:rPr>
               <a:t>LANGUAGE BANK (2 min) — verbal nouns name routes: الدِّرَاسَةُ فِي الجَامِعَةِ · التَّدْرِيبُ المِهْنِيُّ · الحُصُولُ عَلَى شَهَادَةٍ. Possession: عِنْدِي شَهَادَةٌ فِي الإِسْعَافَاتِ الأَوَّلِيَّةِ (lit. at me is a certificate — the thing owned stays nominative).</a:t>
             </a:r>
             <a:endParaRPr lang="en-US" dirty="0"/>
@@ -2400,7 +2432,11 @@
           <a:lstStyle/>
           <a:p>
             <a:r>
-              <a:rPr lang="en-US" dirty="0"/>
+              <a:rPr lang="ar-SA" dirty="0">
+                <a:latin typeface="Amiri" pitchFamily="2" charset="-78"/>
+                <a:ea typeface="Amiri" pitchFamily="2" charset="-78"/>
+                <a:cs typeface="Amiri" pitchFamily="2" charset="-78"/>
+              </a:rPr>
               <a:t>LANGUAGE BANK (2 min) — relative + returning pronoun: الدَّوْرَةُ الَّتِي حَضَرْتُهَا · المَهَارَاتُ الَّتِي تَعَلَّمْتُهَا · الشَّهَادَةُ الَّتِي حَصَلْتُ عَلَيْهَا. Sequence: بَعْدَ أَنْ أُنْهِيَ المَدْرَسَةَ، سَأَدْرُسُ …</a:t>
             </a:r>
             <a:endParaRPr lang="en-US" dirty="0"/>
@@ -2576,7 +2612,11 @@
           <a:lstStyle/>
           <a:p>
             <a:r>
-              <a:rPr lang="en-US" dirty="0"/>
+              <a:rPr lang="ar-SA" dirty="0">
+                <a:latin typeface="Amiri" pitchFamily="2" charset="-78"/>
+                <a:ea typeface="Amiri" pitchFamily="2" charset="-78"/>
+                <a:cs typeface="Amiri" pitchFamily="2" charset="-78"/>
+              </a:rPr>
               <a:t>ROLE PLAY A (Core) — a sports centre.
 SET-UP IN THE BREAKOUT ROOM: A = examiner (reads the left column ONLY — the questions, in order), B = candidate (sees the task column; Core may use the help column), C = observer (ticks the feedback checklist). 1 minute preparation, about 3 minutes speaking, 1 minute feedback, then rotate.
 Task ! is the unexpected question: in the exam the candidate has not seen it — the examiner should read it without warning.
@@ -2668,7 +2708,11 @@
           <a:lstStyle/>
           <a:p>
             <a:r>
-              <a:rPr lang="en-US" dirty="0"/>
+              <a:rPr lang="ar-SA" dirty="0">
+                <a:latin typeface="Amiri" pitchFamily="2" charset="-78"/>
+                <a:ea typeface="Amiri" pitchFamily="2" charset="-78"/>
+                <a:cs typeface="Amiri" pitchFamily="2" charset="-78"/>
+              </a:rPr>
               <a:t>ROLE PLAY B (Core+) — a careers fair.
 SET-UP IN THE BREAKOUT ROOM: A = examiner (reads the left column ONLY — the questions, in order), B = candidate (sees the task column; Core may use the help column), C = observer (ticks the feedback checklist). 1 minute preparation, about 3 minutes speaking, 1 minute feedback, then rotate.
 Task ! is the unexpected question: in the exam the candidate has not seen it — the examiner should read it without warning.
@@ -3156,6 +3200,7 @@
                   <a:srgbClr val="D4AF37"/>
                 </a:solidFill>
                 <a:latin typeface="Amiri" pitchFamily="2" charset="-78"/>
+                <a:ea typeface="Amiri" pitchFamily="2" charset="-78"/>
                 <a:cs typeface="Amiri" pitchFamily="2" charset="-78"/>
               </a:rPr>
               <a:t>م</a:t>
@@ -3362,6 +3407,7 @@
                   <a:srgbClr val="D4AF37"/>
                 </a:solidFill>
                 <a:latin typeface="Amiri" pitchFamily="2" charset="-78"/>
+                <a:ea typeface="Amiri" pitchFamily="2" charset="-78"/>
                 <a:cs typeface="Amiri" pitchFamily="2" charset="-78"/>
               </a:rPr>
               <a:t>وَرْشَةُ التَّحَدُّثِ — التَّدْرِيبُ وَالمَهَارَاتُ</a:t>
@@ -3413,6 +3459,7 @@
                   <a:srgbClr val="C6D2E6"/>
                 </a:solidFill>
                 <a:latin typeface="Amiri" pitchFamily="2" charset="-78"/>
+                <a:ea typeface="Amiri" pitchFamily="2" charset="-78"/>
                 <a:cs typeface="Amiri" pitchFamily="2" charset="-78"/>
               </a:rPr>
               <a:t>عِنْدِي</a:t>
@@ -3439,6 +3486,7 @@
                   <a:srgbClr val="C6D2E6"/>
                 </a:solidFill>
                 <a:latin typeface="Amiri" pitchFamily="2" charset="-78"/>
+                <a:ea typeface="Amiri" pitchFamily="2" charset="-78"/>
                 <a:cs typeface="Amiri" pitchFamily="2" charset="-78"/>
               </a:rPr>
               <a:t>لَدَيَّ</a:t>
@@ -3465,6 +3513,7 @@
                   <a:srgbClr val="C6D2E6"/>
                 </a:solidFill>
                 <a:latin typeface="Amiri" pitchFamily="2" charset="-78"/>
+                <a:ea typeface="Amiri" pitchFamily="2" charset="-78"/>
                 <a:cs typeface="Amiri" pitchFamily="2" charset="-78"/>
               </a:rPr>
               <a:t>بَعْدَ أَنْ أُنْهِيَ</a:t>
@@ -3491,6 +3540,7 @@
                   <a:srgbClr val="C6D2E6"/>
                 </a:solidFill>
                 <a:latin typeface="Amiri" pitchFamily="2" charset="-78"/>
+                <a:ea typeface="Amiri" pitchFamily="2" charset="-78"/>
                 <a:cs typeface="Amiri" pitchFamily="2" charset="-78"/>
               </a:rPr>
               <a:t>المَهَارَاتُ الَّتِي أَحْتَاجُ إِلَيْهَا</a:t>
@@ -3923,6 +3973,7 @@
                   <a:srgbClr val="D4AF37"/>
                 </a:solidFill>
                 <a:latin typeface="Amiri" pitchFamily="2" charset="-78"/>
+                <a:ea typeface="Amiri" pitchFamily="2" charset="-78"/>
                 <a:cs typeface="Amiri" pitchFamily="2" charset="-78"/>
               </a:rPr>
               <a:t>م</a:t>
@@ -4243,6 +4294,7 @@
                   <a:srgbClr val="8A6D1E"/>
                 </a:solidFill>
                 <a:latin typeface="Amiri" pitchFamily="2" charset="-78"/>
+                <a:ea typeface="Amiri" pitchFamily="2" charset="-78"/>
                 <a:cs typeface="Amiri" pitchFamily="2" charset="-78"/>
               </a:rPr>
               <a:t>التَّطَوُّعُ فِي المُسْتَشْفَى</a:t>
@@ -4523,6 +4575,7 @@
                   <a:srgbClr val="1B3B6F"/>
                 </a:solidFill>
                 <a:latin typeface="Amiri" pitchFamily="2" charset="-78"/>
+                <a:ea typeface="Amiri" pitchFamily="2" charset="-78"/>
                 <a:cs typeface="Amiri" pitchFamily="2" charset="-78"/>
               </a:rPr>
               <a:t>لِأَنَّ … وَأُرِيدُ أَنْ …</a:t>
@@ -4599,6 +4652,7 @@
                   <a:srgbClr val="1B3B6F"/>
                 </a:solidFill>
                 <a:latin typeface="Amiri" pitchFamily="2" charset="-78"/>
+                <a:ea typeface="Amiri" pitchFamily="2" charset="-78"/>
                 <a:cs typeface="Amiri" pitchFamily="2" charset="-78"/>
               </a:rPr>
               <a:t>لِمَاذَا تُرِيدُ أَنْ تَتَطَوَّعَ هُنَا؟</a:t>
@@ -4702,6 +4756,7 @@
                   <a:srgbClr val="1B3B6F"/>
                 </a:solidFill>
                 <a:latin typeface="Amiri" pitchFamily="2" charset="-78"/>
+                <a:ea typeface="Amiri" pitchFamily="2" charset="-78"/>
                 <a:cs typeface="Amiri" pitchFamily="2" charset="-78"/>
               </a:rPr>
               <a:t>نَعَمْ، الدَّوْرَةُ الَّتِي حَضَرْتُهَا …</a:t>
@@ -4778,6 +4833,7 @@
                   <a:srgbClr val="1B3B6F"/>
                 </a:solidFill>
                 <a:latin typeface="Amiri" pitchFamily="2" charset="-78"/>
+                <a:ea typeface="Amiri" pitchFamily="2" charset="-78"/>
                 <a:cs typeface="Amiri" pitchFamily="2" charset="-78"/>
               </a:rPr>
               <a:t>هَلْ حَضَرْتَ أَيَّ دَوْرَاتٍ؟</a:t>
@@ -4881,6 +4937,7 @@
                   <a:srgbClr val="1B3B6F"/>
                 </a:solidFill>
                 <a:latin typeface="Amiri" pitchFamily="2" charset="-78"/>
+                <a:ea typeface="Amiri" pitchFamily="2" charset="-78"/>
                 <a:cs typeface="Amiri" pitchFamily="2" charset="-78"/>
               </a:rPr>
               <a:t>سَأَحْتَاجُ إِلَى … لِأَنَّ …</a:t>
@@ -4957,6 +5014,7 @@
                   <a:srgbClr val="1B3B6F"/>
                 </a:solidFill>
                 <a:latin typeface="Amiri" pitchFamily="2" charset="-78"/>
+                <a:ea typeface="Amiri" pitchFamily="2" charset="-78"/>
                 <a:cs typeface="Amiri" pitchFamily="2" charset="-78"/>
               </a:rPr>
               <a:t>مَا المَهَارَاتُ الَّتِي سَتَحْتَاجُ إِلَيْهَا هُنَا؟</a:t>
@@ -5060,6 +5118,7 @@
                   <a:srgbClr val="1B3B6F"/>
                 </a:solidFill>
                 <a:latin typeface="Amiri" pitchFamily="2" charset="-78"/>
+                <a:ea typeface="Amiri" pitchFamily="2" charset="-78"/>
                 <a:cs typeface="Amiri" pitchFamily="2" charset="-78"/>
               </a:rPr>
               <a:t>أَسْتَطِيعُ أَنْ … لِأَنَّ …</a:t>
@@ -5136,6 +5195,7 @@
                   <a:srgbClr val="1B3B6F"/>
                 </a:solidFill>
                 <a:latin typeface="Amiri" pitchFamily="2" charset="-78"/>
+                <a:ea typeface="Amiri" pitchFamily="2" charset="-78"/>
                 <a:cs typeface="Amiri" pitchFamily="2" charset="-78"/>
               </a:rPr>
               <a:t>الوَقْتُ المَطْلُوبُ أَرْبَعُ سَاعَاتٍ أُسْبُوعِيًّا.</a:t>
@@ -5239,6 +5299,7 @@
                   <a:srgbClr val="1B3B6F"/>
                 </a:solidFill>
                 <a:latin typeface="Amiri" pitchFamily="2" charset="-78"/>
+                <a:ea typeface="Amiri" pitchFamily="2" charset="-78"/>
                 <a:cs typeface="Amiri" pitchFamily="2" charset="-78"/>
               </a:rPr>
               <a:t>إِذَا رَأَيْتُ …، فَسَأَجْلِسُ …</a:t>
@@ -5315,6 +5376,7 @@
                   <a:srgbClr val="1B3B6F"/>
                 </a:solidFill>
                 <a:latin typeface="Amiri" pitchFamily="2" charset="-78"/>
+                <a:ea typeface="Amiri" pitchFamily="2" charset="-78"/>
                 <a:cs typeface="Amiri" pitchFamily="2" charset="-78"/>
               </a:rPr>
               <a:t>مَاذَا سَتَفْعَلُ إِذَا رَأَيْتَ مَرِيضًا يَبْكِي؟</a:t>
@@ -5524,6 +5586,7 @@
                   <a:srgbClr val="D4AF37"/>
                 </a:solidFill>
                 <a:latin typeface="Amiri" pitchFamily="2" charset="-78"/>
+                <a:ea typeface="Amiri" pitchFamily="2" charset="-78"/>
                 <a:cs typeface="Amiri" pitchFamily="2" charset="-78"/>
               </a:rPr>
               <a:t>م</a:t>
@@ -5844,6 +5907,7 @@
                   <a:srgbClr val="8A6D1E"/>
                 </a:solidFill>
                 <a:latin typeface="Amiri" pitchFamily="2" charset="-78"/>
+                <a:ea typeface="Amiri" pitchFamily="2" charset="-78"/>
                 <a:cs typeface="Amiri" pitchFamily="2" charset="-78"/>
               </a:rPr>
               <a:t>الجَامِعَةُ أَمِ التَّدْرِيبُ المِهْنِيُّ؟</a:t>
@@ -6124,6 +6188,7 @@
                   <a:srgbClr val="1B3B6F"/>
                 </a:solidFill>
                 <a:latin typeface="Amiri" pitchFamily="2" charset="-78"/>
+                <a:ea typeface="Amiri" pitchFamily="2" charset="-78"/>
                 <a:cs typeface="Amiri" pitchFamily="2" charset="-78"/>
               </a:rPr>
               <a:t>مِنْ نَاحِيَةٍ … وَمِنْ نَاحِيَةٍ أُخْرَى …</a:t>
@@ -6200,6 +6265,7 @@
                   <a:srgbClr val="1B3B6F"/>
                 </a:solidFill>
                 <a:latin typeface="Amiri" pitchFamily="2" charset="-78"/>
+                <a:ea typeface="Amiri" pitchFamily="2" charset="-78"/>
                 <a:cs typeface="Amiri" pitchFamily="2" charset="-78"/>
               </a:rPr>
               <a:t>هَلِ الشَّهَادَةُ الجَامِعِيَّةُ ضَرُورِيَّةٌ لِلنَّجَاحِ اليَوْمَ؟</a:t>
@@ -6303,6 +6369,7 @@
                   <a:srgbClr val="1B3B6F"/>
                 </a:solidFill>
                 <a:latin typeface="Amiri" pitchFamily="2" charset="-78"/>
+                <a:ea typeface="Amiri" pitchFamily="2" charset="-78"/>
                 <a:cs typeface="Amiri" pitchFamily="2" charset="-78"/>
               </a:rPr>
               <a:t>اخْتَرْتُ … لِأَنَّ … فَقَدْ …</a:t>
@@ -6379,6 +6446,7 @@
                   <a:srgbClr val="1B3B6F"/>
                 </a:solidFill>
                 <a:latin typeface="Amiri" pitchFamily="2" charset="-78"/>
+                <a:ea typeface="Amiri" pitchFamily="2" charset="-78"/>
                 <a:cs typeface="Amiri" pitchFamily="2" charset="-78"/>
               </a:rPr>
               <a:t>وَمَاذَا اخْتَرْتَ أَنْتَ؟</a:t>
@@ -6482,6 +6550,7 @@
                   <a:srgbClr val="1B3B6F"/>
                 </a:solidFill>
                 <a:latin typeface="Amiri" pitchFamily="2" charset="-78"/>
+                <a:ea typeface="Amiri" pitchFamily="2" charset="-78"/>
                 <a:cs typeface="Amiri" pitchFamily="2" charset="-78"/>
               </a:rPr>
               <a:t>صَحِيحٌ أَنَّ … غَيْرَ أَنَّ …</a:t>
@@ -6558,6 +6627,7 @@
                   <a:srgbClr val="1B3B6F"/>
                 </a:solidFill>
                 <a:latin typeface="Amiri" pitchFamily="2" charset="-78"/>
+                <a:ea typeface="Amiri" pitchFamily="2" charset="-78"/>
                 <a:cs typeface="Amiri" pitchFamily="2" charset="-78"/>
               </a:rPr>
               <a:t>لٰكِنَّ الجَامِعَةَ تُعَلِّمُ التَّفْكِيرَ النَّقْدِيَّ!</a:t>
@@ -6661,6 +6731,7 @@
                   <a:srgbClr val="1B3B6F"/>
                 </a:solidFill>
                 <a:latin typeface="Amiri" pitchFamily="2" charset="-78"/>
+                <a:ea typeface="Amiri" pitchFamily="2" charset="-78"/>
                 <a:cs typeface="Amiri" pitchFamily="2" charset="-78"/>
               </a:rPr>
               <a:t>المَهَارَاتُ الَّتِي … هِيَ …</a:t>
@@ -6737,6 +6808,7 @@
                   <a:srgbClr val="1B3B6F"/>
                 </a:solidFill>
                 <a:latin typeface="Amiri" pitchFamily="2" charset="-78"/>
+                <a:ea typeface="Amiri" pitchFamily="2" charset="-78"/>
                 <a:cs typeface="Amiri" pitchFamily="2" charset="-78"/>
               </a:rPr>
               <a:t>مَا المَهَارَاتُ الَّتِي يَطْلُبُهَا أَصْحَابُ العَمَلِ؟</a:t>
@@ -6840,6 +6912,7 @@
                   <a:srgbClr val="1B3B6F"/>
                 </a:solidFill>
                 <a:latin typeface="Amiri" pitchFamily="2" charset="-78"/>
+                <a:ea typeface="Amiri" pitchFamily="2" charset="-78"/>
                 <a:cs typeface="Amiri" pitchFamily="2" charset="-78"/>
               </a:rPr>
               <a:t>لَوْ لَمْ أَجِدْ …، لَدَرَسْتُ …</a:t>
@@ -6916,6 +6989,7 @@
                   <a:srgbClr val="1B3B6F"/>
                 </a:solidFill>
                 <a:latin typeface="Amiri" pitchFamily="2" charset="-78"/>
+                <a:ea typeface="Amiri" pitchFamily="2" charset="-78"/>
                 <a:cs typeface="Amiri" pitchFamily="2" charset="-78"/>
               </a:rPr>
               <a:t>لَوْ لَمْ تَجِدْ تَدْرِيبًا، مَاذَا كُنْتَ سَتَفْعَلُ؟</a:t>
@@ -7125,6 +7199,7 @@
                   <a:srgbClr val="D4AF37"/>
                 </a:solidFill>
                 <a:latin typeface="Amiri" pitchFamily="2" charset="-78"/>
+                <a:ea typeface="Amiri" pitchFamily="2" charset="-78"/>
                 <a:cs typeface="Amiri" pitchFamily="2" charset="-78"/>
               </a:rPr>
               <a:t>م</a:t>
@@ -7445,6 +7520,7 @@
                   <a:srgbClr val="8A6D1E"/>
                 </a:solidFill>
                 <a:latin typeface="Amiri" pitchFamily="2" charset="-78"/>
+                <a:ea typeface="Amiri" pitchFamily="2" charset="-78"/>
                 <a:cs typeface="Amiri" pitchFamily="2" charset="-78"/>
               </a:rPr>
               <a:t>وَرَقَةُ المُلَاحِظِ</a:t>
@@ -8915,6 +8991,7 @@
                   <a:srgbClr val="D4AF37"/>
                 </a:solidFill>
                 <a:latin typeface="Amiri" pitchFamily="2" charset="-78"/>
+                <a:ea typeface="Amiri" pitchFamily="2" charset="-78"/>
                 <a:cs typeface="Amiri" pitchFamily="2" charset="-78"/>
               </a:rPr>
               <a:t>م</a:t>
@@ -9235,6 +9312,7 @@
                   <a:srgbClr val="8A6D1E"/>
                 </a:solidFill>
                 <a:latin typeface="Amiri" pitchFamily="2" charset="-78"/>
+                <a:ea typeface="Amiri" pitchFamily="2" charset="-78"/>
                 <a:cs typeface="Amiri" pitchFamily="2" charset="-78"/>
               </a:rPr>
               <a:t>نَمُوذَجُ الإِجَابَةِ</a:t>
@@ -9477,6 +9555,7 @@
                   <a:srgbClr val="1B3B6F"/>
                 </a:solidFill>
                 <a:latin typeface="Amiri" pitchFamily="2" charset="-78"/>
+                <a:ea typeface="Amiri" pitchFamily="2" charset="-78"/>
                 <a:cs typeface="Amiri" pitchFamily="2" charset="-78"/>
               </a:rPr>
               <a:t>أُرِيدُ أَنْ أُسَجِّلَ فِي دَوْرَةِ الإِنْقَاذِ.</a:t>
@@ -9553,6 +9632,7 @@
                   <a:srgbClr val="1B3B6F"/>
                 </a:solidFill>
                 <a:latin typeface="Amiri" pitchFamily="2" charset="-78"/>
+                <a:ea typeface="Amiri" pitchFamily="2" charset="-78"/>
                 <a:cs typeface="Amiri" pitchFamily="2" charset="-78"/>
               </a:rPr>
               <a:t>أَهْلًا! كَيْفَ أُسَاعِدُكَ؟</a:t>
@@ -9656,6 +9736,7 @@
                   <a:srgbClr val="1B3B6F"/>
                 </a:solidFill>
                 <a:latin typeface="Amiri" pitchFamily="2" charset="-78"/>
+                <a:ea typeface="Amiri" pitchFamily="2" charset="-78"/>
                 <a:cs typeface="Amiri" pitchFamily="2" charset="-78"/>
               </a:rPr>
               <a:t>عُمْرِي سِتَّ عَشْرَةَ سَنَةً.</a:t>
@@ -9732,6 +9813,7 @@
                   <a:srgbClr val="1B3B6F"/>
                 </a:solidFill>
                 <a:latin typeface="Amiri" pitchFamily="2" charset="-78"/>
+                <a:ea typeface="Amiri" pitchFamily="2" charset="-78"/>
                 <a:cs typeface="Amiri" pitchFamily="2" charset="-78"/>
               </a:rPr>
               <a:t>كَمْ عُمْرُكَ؟</a:t>
@@ -9835,6 +9917,7 @@
                   <a:srgbClr val="1B3B6F"/>
                 </a:solidFill>
                 <a:latin typeface="Amiri" pitchFamily="2" charset="-78"/>
+                <a:ea typeface="Amiri" pitchFamily="2" charset="-78"/>
                 <a:cs typeface="Amiri" pitchFamily="2" charset="-78"/>
               </a:rPr>
               <a:t>نَعَمْ، عِنْدِي شَهَادَةٌ فِي السِّبَاحَةِ.</a:t>
@@ -9911,6 +9994,7 @@
                   <a:srgbClr val="1B3B6F"/>
                 </a:solidFill>
                 <a:latin typeface="Amiri" pitchFamily="2" charset="-78"/>
+                <a:ea typeface="Amiri" pitchFamily="2" charset="-78"/>
                 <a:cs typeface="Amiri" pitchFamily="2" charset="-78"/>
               </a:rPr>
               <a:t>هَلْ تَسْبَحُ جَيِّدًا؟</a:t>
@@ -10014,6 +10098,7 @@
                   <a:srgbClr val="1B3B6F"/>
                 </a:solidFill>
                 <a:latin typeface="Amiri" pitchFamily="2" charset="-78"/>
+                <a:ea typeface="Amiri" pitchFamily="2" charset="-78"/>
                 <a:cs typeface="Amiri" pitchFamily="2" charset="-78"/>
               </a:rPr>
               <a:t>كَمْ أُسْبُوعًا تَسْتَمِرُّ الدَّوْرَةُ؟</a:t>
@@ -10090,6 +10175,7 @@
                   <a:srgbClr val="1B3B6F"/>
                 </a:solidFill>
                 <a:latin typeface="Amiri" pitchFamily="2" charset="-78"/>
+                <a:ea typeface="Amiri" pitchFamily="2" charset="-78"/>
                 <a:cs typeface="Amiri" pitchFamily="2" charset="-78"/>
               </a:rPr>
               <a:t>الدَّوْرَةُ يَوْمَ السَّبْتِ.</a:t>
@@ -10193,6 +10279,7 @@
                   <a:srgbClr val="1B3B6F"/>
                 </a:solidFill>
                 <a:latin typeface="Amiri" pitchFamily="2" charset="-78"/>
+                <a:ea typeface="Amiri" pitchFamily="2" charset="-78"/>
                 <a:cs typeface="Amiri" pitchFamily="2" charset="-78"/>
               </a:rPr>
               <a:t>لِأَنِّي أُرِيدُ أَنْ أَعْمَلَ مُنْقِذًا فِي الصَّيْفِ.</a:t>
@@ -10269,6 +10356,7 @@
                   <a:srgbClr val="1B3B6F"/>
                 </a:solidFill>
                 <a:latin typeface="Amiri" pitchFamily="2" charset="-78"/>
+                <a:ea typeface="Amiri" pitchFamily="2" charset="-78"/>
                 <a:cs typeface="Amiri" pitchFamily="2" charset="-78"/>
               </a:rPr>
               <a:t>لِمَاذَا تُرِيدُ هٰذِهِ الدَّوْرَةَ؟</a:t>
@@ -10478,6 +10566,7 @@
                   <a:srgbClr val="D4AF37"/>
                 </a:solidFill>
                 <a:latin typeface="Amiri" pitchFamily="2" charset="-78"/>
+                <a:ea typeface="Amiri" pitchFamily="2" charset="-78"/>
                 <a:cs typeface="Amiri" pitchFamily="2" charset="-78"/>
               </a:rPr>
               <a:t>م</a:t>
@@ -10798,6 +10887,7 @@
                   <a:srgbClr val="8A6D1E"/>
                 </a:solidFill>
                 <a:latin typeface="Amiri" pitchFamily="2" charset="-78"/>
+                <a:ea typeface="Amiri" pitchFamily="2" charset="-78"/>
                 <a:cs typeface="Amiri" pitchFamily="2" charset="-78"/>
               </a:rPr>
               <a:t>نَمُوذَجُ الإِجَابَةِ</a:t>
@@ -11040,6 +11130,7 @@
                   <a:srgbClr val="1B3B6F"/>
                 </a:solidFill>
                 <a:latin typeface="Amiri" pitchFamily="2" charset="-78"/>
+                <a:ea typeface="Amiri" pitchFamily="2" charset="-78"/>
                 <a:cs typeface="Amiri" pitchFamily="2" charset="-78"/>
               </a:rPr>
               <a:t>بَعْدَ أَنْ أُنْهِيَ المَدْرَسَةَ، سَأَدْرُسُ فِي كُلِّيَّةٍ مِهْنِيَّةٍ.</a:t>
@@ -11116,6 +11207,7 @@
                   <a:srgbClr val="1B3B6F"/>
                 </a:solidFill>
                 <a:latin typeface="Amiri" pitchFamily="2" charset="-78"/>
+                <a:ea typeface="Amiri" pitchFamily="2" charset="-78"/>
                 <a:cs typeface="Amiri" pitchFamily="2" charset="-78"/>
               </a:rPr>
               <a:t>مَاذَا سَتَفْعَلُ بَعْدَ المَدْرَسَةِ؟</a:t>
@@ -11219,6 +11311,7 @@
                   <a:srgbClr val="1B3B6F"/>
                 </a:solidFill>
                 <a:latin typeface="Amiri" pitchFamily="2" charset="-78"/>
+                <a:ea typeface="Amiri" pitchFamily="2" charset="-78"/>
                 <a:cs typeface="Amiri" pitchFamily="2" charset="-78"/>
               </a:rPr>
               <a:t>يُعْجِبُنِي الطَّبْخُ، لِأَنِّي أُحِبُّ العَمَلَ بِيَدَيَّ.</a:t>
@@ -11295,6 +11388,7 @@
                   <a:srgbClr val="1B3B6F"/>
                 </a:solidFill>
                 <a:latin typeface="Amiri" pitchFamily="2" charset="-78"/>
+                <a:ea typeface="Amiri" pitchFamily="2" charset="-78"/>
                 <a:cs typeface="Amiri" pitchFamily="2" charset="-78"/>
               </a:rPr>
               <a:t>أَيَّ مَجَالٍ يُعْجِبُكَ؟</a:t>
@@ -11398,6 +11492,7 @@
                   <a:srgbClr val="1B3B6F"/>
                 </a:solidFill>
                 <a:latin typeface="Amiri" pitchFamily="2" charset="-78"/>
+                <a:ea typeface="Amiri" pitchFamily="2" charset="-78"/>
                 <a:cs typeface="Amiri" pitchFamily="2" charset="-78"/>
               </a:rPr>
               <a:t>هَلْ تَشْمَلُ الدَّوْرَةُ تَدْرِيبًا فِي مَطْعَمٍ حَقِيقِيٍّ؟</a:t>
@@ -11474,6 +11569,7 @@
                   <a:srgbClr val="1B3B6F"/>
                 </a:solidFill>
                 <a:latin typeface="Amiri" pitchFamily="2" charset="-78"/>
+                <a:ea typeface="Amiri" pitchFamily="2" charset="-78"/>
                 <a:cs typeface="Amiri" pitchFamily="2" charset="-78"/>
               </a:rPr>
               <a:t>عِنْدَنَا دَوْرَةٌ لِلطُّهَاةِ لِمُدَّةِ سَنَتَيْنِ.</a:t>
@@ -11577,6 +11673,7 @@
                   <a:srgbClr val="1B3B6F"/>
                 </a:solidFill>
                 <a:latin typeface="Amiri" pitchFamily="2" charset="-78"/>
+                <a:ea typeface="Amiri" pitchFamily="2" charset="-78"/>
                 <a:cs typeface="Amiri" pitchFamily="2" charset="-78"/>
               </a:rPr>
               <a:t>لَدَيَّ مَهَارَةُ العَمَلِ الجَمَاعِيِّ، لِأَنِّي أَلْعَبُ فِي فَرِيقِ كُرَةِ السَّلَّةِ، وَأَنَا مُنَظَّمٌ جِدًّا.</a:t>
@@ -11653,6 +11750,7 @@
                   <a:srgbClr val="1B3B6F"/>
                 </a:solidFill>
                 <a:latin typeface="Amiri" pitchFamily="2" charset="-78"/>
+                <a:ea typeface="Amiri" pitchFamily="2" charset="-78"/>
                 <a:cs typeface="Amiri" pitchFamily="2" charset="-78"/>
               </a:rPr>
               <a:t>نَعَمْ، ثَلَاثَةَ أَشْهُرٍ فِي فُنْدُقٍ. مَا مَهَارَاتُكَ؟</a:t>
@@ -11756,6 +11854,7 @@
                   <a:srgbClr val="1B3B6F"/>
                 </a:solidFill>
                 <a:latin typeface="Amiri" pitchFamily="2" charset="-78"/>
+                <a:ea typeface="Amiri" pitchFamily="2" charset="-78"/>
                 <a:cs typeface="Amiri" pitchFamily="2" charset="-78"/>
               </a:rPr>
               <a:t>نَعَمْ، عَمِلْتُ فِي مَخْبَزِ عَمِّي فِي الصَّيْفِ، حَيْثُ تَعَلَّمْتُ صُنْعَ الخُبْزِ.</a:t>
@@ -11832,6 +11931,7 @@
                   <a:srgbClr val="1B3B6F"/>
                 </a:solidFill>
                 <a:latin typeface="Amiri" pitchFamily="2" charset="-78"/>
+                <a:ea typeface="Amiri" pitchFamily="2" charset="-78"/>
                 <a:cs typeface="Amiri" pitchFamily="2" charset="-78"/>
               </a:rPr>
               <a:t>هَلْ عِنْدَكَ خِبْرَةُ عَمَلٍ؟</a:t>
@@ -12041,6 +12141,7 @@
                   <a:srgbClr val="D4AF37"/>
                 </a:solidFill>
                 <a:latin typeface="Amiri" pitchFamily="2" charset="-78"/>
+                <a:ea typeface="Amiri" pitchFamily="2" charset="-78"/>
                 <a:cs typeface="Amiri" pitchFamily="2" charset="-78"/>
               </a:rPr>
               <a:t>م</a:t>
@@ -12361,6 +12462,7 @@
                   <a:srgbClr val="8A6D1E"/>
                 </a:solidFill>
                 <a:latin typeface="Amiri" pitchFamily="2" charset="-78"/>
+                <a:ea typeface="Amiri" pitchFamily="2" charset="-78"/>
                 <a:cs typeface="Amiri" pitchFamily="2" charset="-78"/>
               </a:rPr>
               <a:t>نَمُوذَجُ الإِجَابَةِ</a:t>
@@ -12603,6 +12705,7 @@
                   <a:srgbClr val="1B3B6F"/>
                 </a:solidFill>
                 <a:latin typeface="Amiri" pitchFamily="2" charset="-78"/>
+                <a:ea typeface="Amiri" pitchFamily="2" charset="-78"/>
                 <a:cs typeface="Amiri" pitchFamily="2" charset="-78"/>
               </a:rPr>
               <a:t>لِأَنِّي أُرِيدُ أَنْ أَدْرُسَ التَّمْرِيضَ، وَأُرِيدُ أَنْ أَكْتَسِبَ خِبْرَةً حَقِيقِيَّةً قَبْلَ الجَامِعَةِ.</a:t>
@@ -12679,6 +12782,7 @@
                   <a:srgbClr val="1B3B6F"/>
                 </a:solidFill>
                 <a:latin typeface="Amiri" pitchFamily="2" charset="-78"/>
+                <a:ea typeface="Amiri" pitchFamily="2" charset="-78"/>
                 <a:cs typeface="Amiri" pitchFamily="2" charset="-78"/>
               </a:rPr>
               <a:t>لِمَاذَا تُرِيدُ أَنْ تَتَطَوَّعَ هُنَا؟</a:t>
@@ -12782,6 +12886,7 @@
                   <a:srgbClr val="1B3B6F"/>
                 </a:solidFill>
                 <a:latin typeface="Amiri" pitchFamily="2" charset="-78"/>
+                <a:ea typeface="Amiri" pitchFamily="2" charset="-78"/>
                 <a:cs typeface="Amiri" pitchFamily="2" charset="-78"/>
               </a:rPr>
               <a:t>نَعَمْ، الدَّوْرَةُ الَّتِي حَضَرْتُهَا فِي الشِّتَاءِ كَانَتْ فِي الإِسْعَافَاتِ الأَوَّلِيَّةِ، وَحَصَلْتُ فِي نِهَايَتِهَا عَلَى شَهَادَةٍ.</a:t>
@@ -12858,6 +12963,7 @@
                   <a:srgbClr val="1B3B6F"/>
                 </a:solidFill>
                 <a:latin typeface="Amiri" pitchFamily="2" charset="-78"/>
+                <a:ea typeface="Amiri" pitchFamily="2" charset="-78"/>
                 <a:cs typeface="Amiri" pitchFamily="2" charset="-78"/>
               </a:rPr>
               <a:t>هَلْ حَضَرْتَ أَيَّ دَوْرَاتٍ؟</a:t>
@@ -12961,6 +13067,7 @@
                   <a:srgbClr val="1B3B6F"/>
                 </a:solidFill>
                 <a:latin typeface="Amiri" pitchFamily="2" charset="-78"/>
+                <a:ea typeface="Amiri" pitchFamily="2" charset="-78"/>
                 <a:cs typeface="Amiri" pitchFamily="2" charset="-78"/>
               </a:rPr>
               <a:t>سَأَحْتَاجُ إِلَى الصَّبْرِ وَمَهَارَةِ الاسْتِمَاعِ، لِأَنَّ المَرْضَى أَحْيَانًا قَلِقُونَ وَوَحِيدُونَ.</a:t>
@@ -13037,6 +13144,7 @@
                   <a:srgbClr val="1B3B6F"/>
                 </a:solidFill>
                 <a:latin typeface="Amiri" pitchFamily="2" charset="-78"/>
+                <a:ea typeface="Amiri" pitchFamily="2" charset="-78"/>
                 <a:cs typeface="Amiri" pitchFamily="2" charset="-78"/>
               </a:rPr>
               <a:t>مَا المَهَارَاتُ الَّتِي سَتَحْتَاجُ إِلَيْهَا هُنَا؟</a:t>
@@ -13140,6 +13248,7 @@
                   <a:srgbClr val="1B3B6F"/>
                 </a:solidFill>
                 <a:latin typeface="Amiri" pitchFamily="2" charset="-78"/>
+                <a:ea typeface="Amiri" pitchFamily="2" charset="-78"/>
                 <a:cs typeface="Amiri" pitchFamily="2" charset="-78"/>
               </a:rPr>
               <a:t>أَسْتَطِيعُ أَنْ آتِيَ يَوْمَ الأَحَدِ صَبَاحًا، لِأَنَّهُ لَيْسَ عِنْدِي دُرُوسٌ، وَسَأُرَاجِعُ فِي المَسَاءِ.</a:t>
@@ -13216,6 +13325,7 @@
                   <a:srgbClr val="1B3B6F"/>
                 </a:solidFill>
                 <a:latin typeface="Amiri" pitchFamily="2" charset="-78"/>
+                <a:ea typeface="Amiri" pitchFamily="2" charset="-78"/>
                 <a:cs typeface="Amiri" pitchFamily="2" charset="-78"/>
               </a:rPr>
               <a:t>الوَقْتُ المَطْلُوبُ أَرْبَعُ سَاعَاتٍ أُسْبُوعِيًّا.</a:t>
@@ -13319,6 +13429,7 @@
                   <a:srgbClr val="1B3B6F"/>
                 </a:solidFill>
                 <a:latin typeface="Amiri" pitchFamily="2" charset="-78"/>
+                <a:ea typeface="Amiri" pitchFamily="2" charset="-78"/>
                 <a:cs typeface="Amiri" pitchFamily="2" charset="-78"/>
               </a:rPr>
               <a:t>إِذَا رَأَيْتُ مَرِيضًا يَبْكِي، فَسَأَجْلِسُ بِجَانِبِهِ وَأَسْتَمِعُ إِلَيْهِ، ثُمَّ أُخْبِرُ المُمَرِّضَةَ.</a:t>
@@ -13395,6 +13506,7 @@
                   <a:srgbClr val="1B3B6F"/>
                 </a:solidFill>
                 <a:latin typeface="Amiri" pitchFamily="2" charset="-78"/>
+                <a:ea typeface="Amiri" pitchFamily="2" charset="-78"/>
                 <a:cs typeface="Amiri" pitchFamily="2" charset="-78"/>
               </a:rPr>
               <a:t>مَاذَا سَتَفْعَلُ إِذَا رَأَيْتَ مَرِيضًا يَبْكِي؟</a:t>
@@ -13604,6 +13716,7 @@
                   <a:srgbClr val="D4AF37"/>
                 </a:solidFill>
                 <a:latin typeface="Amiri" pitchFamily="2" charset="-78"/>
+                <a:ea typeface="Amiri" pitchFamily="2" charset="-78"/>
                 <a:cs typeface="Amiri" pitchFamily="2" charset="-78"/>
               </a:rPr>
               <a:t>م</a:t>
@@ -13924,6 +14037,7 @@
                   <a:srgbClr val="8A6D1E"/>
                 </a:solidFill>
                 <a:latin typeface="Amiri" pitchFamily="2" charset="-78"/>
+                <a:ea typeface="Amiri" pitchFamily="2" charset="-78"/>
                 <a:cs typeface="Amiri" pitchFamily="2" charset="-78"/>
               </a:rPr>
               <a:t>نَمُوذَجُ الإِجَابَةِ</a:t>
@@ -14166,6 +14280,7 @@
                   <a:srgbClr val="1B3B6F"/>
                 </a:solidFill>
                 <a:latin typeface="Amiri" pitchFamily="2" charset="-78"/>
+                <a:ea typeface="Amiri" pitchFamily="2" charset="-78"/>
                 <a:cs typeface="Amiri" pitchFamily="2" charset="-78"/>
               </a:rPr>
               <a:t>مِنْ نَاحِيَةٍ، تَطْلُبُ مِهَنٌ كَالطِّبِّ وَالقَانُونِ شَهَادَةً جَامِعِيَّةً، وَمِنْ نَاحِيَةٍ أُخْرَى، يَنْجَحُ كَثِيرُونَ بِالتَّدْرِيبِ المِهْنِيِّ وَالخِبْرَةِ العَمَلِيَّةِ.</a:t>
@@ -14242,6 +14357,7 @@
                   <a:srgbClr val="1B3B6F"/>
                 </a:solidFill>
                 <a:latin typeface="Amiri" pitchFamily="2" charset="-78"/>
+                <a:ea typeface="Amiri" pitchFamily="2" charset="-78"/>
                 <a:cs typeface="Amiri" pitchFamily="2" charset="-78"/>
               </a:rPr>
               <a:t>هَلِ الشَّهَادَةُ الجَامِعِيَّةُ ضَرُورِيَّةٌ لِلنَّجَاحِ اليَوْمَ؟</a:t>
@@ -14345,6 +14461,7 @@
                   <a:srgbClr val="1B3B6F"/>
                 </a:solidFill>
                 <a:latin typeface="Amiri" pitchFamily="2" charset="-78"/>
+                <a:ea typeface="Amiri" pitchFamily="2" charset="-78"/>
                 <a:cs typeface="Amiri" pitchFamily="2" charset="-78"/>
               </a:rPr>
               <a:t>اخْتَرْتُ تَلْمَذَةً مِهْنِيَّةً فِي الهَنْدَسَةِ، لِأَنِّي أَتَعَلَّمُ وَأَكْسِبُ رَاتِبًا فِي الوَقْتِ نَفْسِهِ؛ فَقَدْ رَأَيْتُ أَخِي يَتَخَرَّجُ بِدُيُونٍ كَبِيرَةٍ.</a:t>
@@ -14421,6 +14538,7 @@
                   <a:srgbClr val="1B3B6F"/>
                 </a:solidFill>
                 <a:latin typeface="Amiri" pitchFamily="2" charset="-78"/>
+                <a:ea typeface="Amiri" pitchFamily="2" charset="-78"/>
                 <a:cs typeface="Amiri" pitchFamily="2" charset="-78"/>
               </a:rPr>
               <a:t>وَمَاذَا اخْتَرْتَ أَنْتَ؟</a:t>
@@ -14524,6 +14642,7 @@
                   <a:srgbClr val="1B3B6F"/>
                 </a:solidFill>
                 <a:latin typeface="Amiri" pitchFamily="2" charset="-78"/>
+                <a:ea typeface="Amiri" pitchFamily="2" charset="-78"/>
                 <a:cs typeface="Amiri" pitchFamily="2" charset="-78"/>
               </a:rPr>
               <a:t>صَحِيحٌ أَنَّهَا تُنَمِّي التَّفْكِيرَ، غَيْرَ أَنَّ حَلَّ المُشْكِلَاتِ الحَقِيقِيَّةِ فِي المَصْنَعِ يُعَلِّمُ التَّفْكِيرَ أَيْضًا، وَبِطَرِيقَةٍ عَمَلِيَّةٍ.</a:t>
@@ -14600,6 +14719,7 @@
                   <a:srgbClr val="1B3B6F"/>
                 </a:solidFill>
                 <a:latin typeface="Amiri" pitchFamily="2" charset="-78"/>
+                <a:ea typeface="Amiri" pitchFamily="2" charset="-78"/>
                 <a:cs typeface="Amiri" pitchFamily="2" charset="-78"/>
               </a:rPr>
               <a:t>لٰكِنَّ الجَامِعَةَ تُعَلِّمُ التَّفْكِيرَ النَّقْدِيَّ!</a:t>
@@ -14703,6 +14823,7 @@
                   <a:srgbClr val="1B3B6F"/>
                 </a:solidFill>
                 <a:latin typeface="Amiri" pitchFamily="2" charset="-78"/>
+                <a:ea typeface="Amiri" pitchFamily="2" charset="-78"/>
                 <a:cs typeface="Amiri" pitchFamily="2" charset="-78"/>
               </a:rPr>
               <a:t>المَهَارَاتُ الَّتِي يَطْلُبُونَهَا أَكْثَرَ هِيَ التَّوَاصُلُ وَالعَمَلُ الجَمَاعِيُّ وَالقُدْرَةُ عَلَى التَّعَلُّمِ المُسْتَمِرِّ.</a:t>
@@ -14779,6 +14900,7 @@
                   <a:srgbClr val="1B3B6F"/>
                 </a:solidFill>
                 <a:latin typeface="Amiri" pitchFamily="2" charset="-78"/>
+                <a:ea typeface="Amiri" pitchFamily="2" charset="-78"/>
                 <a:cs typeface="Amiri" pitchFamily="2" charset="-78"/>
               </a:rPr>
               <a:t>مَا المَهَارَاتُ الَّتِي يَطْلُبُهَا أَصْحَابُ العَمَلِ؟</a:t>
@@ -14882,6 +15004,7 @@
                   <a:srgbClr val="1B3B6F"/>
                 </a:solidFill>
                 <a:latin typeface="Amiri" pitchFamily="2" charset="-78"/>
+                <a:ea typeface="Amiri" pitchFamily="2" charset="-78"/>
                 <a:cs typeface="Amiri" pitchFamily="2" charset="-78"/>
               </a:rPr>
               <a:t>لَوْ لَمْ أَجِدْ تَدْرِيبًا، لَدَرَسْتُ الهَنْدَسَةَ فِي الجَامِعَةِ، وَلَعَمِلْتُ فِي الصَّيْفِ لِأَكْتَسِبَ الخِبْرَةَ.</a:t>
@@ -14958,6 +15081,7 @@
                   <a:srgbClr val="1B3B6F"/>
                 </a:solidFill>
                 <a:latin typeface="Amiri" pitchFamily="2" charset="-78"/>
+                <a:ea typeface="Amiri" pitchFamily="2" charset="-78"/>
                 <a:cs typeface="Amiri" pitchFamily="2" charset="-78"/>
               </a:rPr>
               <a:t>لَوْ لَمْ تَجِدْ تَدْرِيبًا، مَاذَا كُنْتَ سَتَفْعَلُ؟</a:t>
@@ -15167,6 +15291,7 @@
                   <a:srgbClr val="D4AF37"/>
                 </a:solidFill>
                 <a:latin typeface="Amiri" pitchFamily="2" charset="-78"/>
+                <a:ea typeface="Amiri" pitchFamily="2" charset="-78"/>
                 <a:cs typeface="Amiri" pitchFamily="2" charset="-78"/>
               </a:rPr>
               <a:t>م</a:t>
@@ -15487,6 +15612,7 @@
                   <a:srgbClr val="8A6D1E"/>
                 </a:solidFill>
                 <a:latin typeface="Amiri" pitchFamily="2" charset="-78"/>
+                <a:ea typeface="Amiri" pitchFamily="2" charset="-78"/>
                 <a:cs typeface="Amiri" pitchFamily="2" charset="-78"/>
               </a:rPr>
               <a:t>مَهَارَاتِي وَشَهَادَاتِي</a:t>
@@ -15767,6 +15893,7 @@
                   <a:srgbClr val="1B3B6F"/>
                 </a:solidFill>
                 <a:latin typeface="Amiri" pitchFamily="2" charset="-78"/>
+                <a:ea typeface="Amiri" pitchFamily="2" charset="-78"/>
                 <a:cs typeface="Amiri" pitchFamily="2" charset="-78"/>
               </a:rPr>
               <a:t>نَعَمْ، عِنْدِي شَهَادَةٌ فِي …</a:t>
@@ -15843,6 +15970,7 @@
                   <a:srgbClr val="1B3B6F"/>
                 </a:solidFill>
                 <a:latin typeface="Amiri" pitchFamily="2" charset="-78"/>
+                <a:ea typeface="Amiri" pitchFamily="2" charset="-78"/>
                 <a:cs typeface="Amiri" pitchFamily="2" charset="-78"/>
               </a:rPr>
               <a:t>هَلْ عِنْدَكَ شَهَادَةٌ فِي شَيْءٍ؟</a:t>
@@ -16011,6 +16139,7 @@
                   <a:srgbClr val="1B3B6F"/>
                 </a:solidFill>
                 <a:latin typeface="Amiri" pitchFamily="2" charset="-78"/>
+                <a:ea typeface="Amiri" pitchFamily="2" charset="-78"/>
                 <a:cs typeface="Amiri" pitchFamily="2" charset="-78"/>
               </a:rPr>
               <a:t>مَهَارَتِي الأَقْوَى …</a:t>
@@ -16087,6 +16216,7 @@
                   <a:srgbClr val="1B3B6F"/>
                 </a:solidFill>
                 <a:latin typeface="Amiri" pitchFamily="2" charset="-78"/>
+                <a:ea typeface="Amiri" pitchFamily="2" charset="-78"/>
                 <a:cs typeface="Amiri" pitchFamily="2" charset="-78"/>
               </a:rPr>
               <a:t>مَا مَهَارَتُكَ الأَقْوَى؟</a:t>
@@ -16255,6 +16385,7 @@
                   <a:srgbClr val="1B3B6F"/>
                 </a:solidFill>
                 <a:latin typeface="Amiri" pitchFamily="2" charset="-78"/>
+                <a:ea typeface="Amiri" pitchFamily="2" charset="-78"/>
                 <a:cs typeface="Amiri" pitchFamily="2" charset="-78"/>
               </a:rPr>
               <a:t>نَعَمْ، حَضَرْتُ دَوْرَةً فِي …</a:t>
@@ -16331,6 +16462,7 @@
                   <a:srgbClr val="1B3B6F"/>
                 </a:solidFill>
                 <a:latin typeface="Amiri" pitchFamily="2" charset="-78"/>
+                <a:ea typeface="Amiri" pitchFamily="2" charset="-78"/>
                 <a:cs typeface="Amiri" pitchFamily="2" charset="-78"/>
               </a:rPr>
               <a:t>هَلْ حَضَرْتَ دَوْرَةً مِنْ قَبْلُ؟</a:t>
@@ -16499,6 +16631,7 @@
                   <a:srgbClr val="1B3B6F"/>
                 </a:solidFill>
                 <a:latin typeface="Amiri" pitchFamily="2" charset="-78"/>
+                <a:ea typeface="Amiri" pitchFamily="2" charset="-78"/>
                 <a:cs typeface="Amiri" pitchFamily="2" charset="-78"/>
               </a:rPr>
               <a:t>نَعَمْ، أَتَطَوَّعُ فِي …</a:t>
@@ -16575,6 +16708,7 @@
                   <a:srgbClr val="1B3B6F"/>
                 </a:solidFill>
                 <a:latin typeface="Amiri" pitchFamily="2" charset="-78"/>
+                <a:ea typeface="Amiri" pitchFamily="2" charset="-78"/>
                 <a:cs typeface="Amiri" pitchFamily="2" charset="-78"/>
               </a:rPr>
               <a:t>هَلْ تَتَطَوَّعُ؟</a:t>
@@ -16743,6 +16877,7 @@
                   <a:srgbClr val="1B3B6F"/>
                 </a:solidFill>
                 <a:latin typeface="Amiri" pitchFamily="2" charset="-78"/>
+                <a:ea typeface="Amiri" pitchFamily="2" charset="-78"/>
                 <a:cs typeface="Amiri" pitchFamily="2" charset="-78"/>
               </a:rPr>
               <a:t>سَأَدْرُسُ …</a:t>
@@ -16819,6 +16954,7 @@
                   <a:srgbClr val="1B3B6F"/>
                 </a:solidFill>
                 <a:latin typeface="Amiri" pitchFamily="2" charset="-78"/>
+                <a:ea typeface="Amiri" pitchFamily="2" charset="-78"/>
                 <a:cs typeface="Amiri" pitchFamily="2" charset="-78"/>
               </a:rPr>
               <a:t>مَاذَا سَتَدْرُسُ بَعْدَ المَدْرَسَةِ؟</a:t>
@@ -16973,6 +17109,7 @@
                   <a:srgbClr val="1B3B6F"/>
                 </a:solidFill>
                 <a:latin typeface="Amiri" pitchFamily="2" charset="-78"/>
+                <a:ea typeface="Amiri" pitchFamily="2" charset="-78"/>
                 <a:cs typeface="Amiri" pitchFamily="2" charset="-78"/>
               </a:rPr>
               <a:t>عَفْوًا، هَلْ يُمْكِنُ أَنْ تُعِيدَ السُّؤَالَ؟</a:t>
@@ -17106,6 +17243,7 @@
                   <a:srgbClr val="D4AF37"/>
                 </a:solidFill>
                 <a:latin typeface="Amiri" pitchFamily="2" charset="-78"/>
+                <a:ea typeface="Amiri" pitchFamily="2" charset="-78"/>
                 <a:cs typeface="Amiri" pitchFamily="2" charset="-78"/>
               </a:rPr>
               <a:t>م</a:t>
@@ -17426,6 +17564,7 @@
                   <a:srgbClr val="8A6D1E"/>
                 </a:solidFill>
                 <a:latin typeface="Amiri" pitchFamily="2" charset="-78"/>
+                <a:ea typeface="Amiri" pitchFamily="2" charset="-78"/>
                 <a:cs typeface="Amiri" pitchFamily="2" charset="-78"/>
               </a:rPr>
               <a:t>التَّدْرِيبُ وَالمُسْتَقْبَلُ</a:t>
@@ -17706,6 +17845,7 @@
                   <a:srgbClr val="1B3B6F"/>
                 </a:solidFill>
                 <a:latin typeface="Amiri" pitchFamily="2" charset="-78"/>
+                <a:ea typeface="Amiri" pitchFamily="2" charset="-78"/>
                 <a:cs typeface="Amiri" pitchFamily="2" charset="-78"/>
               </a:rPr>
               <a:t>الدَّوْرَةُ الَّتِي حَضَرْتُهَا …</a:t>
@@ -17782,6 +17922,7 @@
                   <a:srgbClr val="1B3B6F"/>
                 </a:solidFill>
                 <a:latin typeface="Amiri" pitchFamily="2" charset="-78"/>
+                <a:ea typeface="Amiri" pitchFamily="2" charset="-78"/>
                 <a:cs typeface="Amiri" pitchFamily="2" charset="-78"/>
               </a:rPr>
               <a:t>صِفْ دَوْرَةً حَضَرْتَهَا.</a:t>
@@ -17885,6 +18026,7 @@
                   <a:srgbClr val="1B3B6F"/>
                 </a:solidFill>
                 <a:latin typeface="Amiri" pitchFamily="2" charset="-78"/>
+                <a:ea typeface="Amiri" pitchFamily="2" charset="-78"/>
                 <a:cs typeface="Amiri" pitchFamily="2" charset="-78"/>
               </a:rPr>
               <a:t>أَتَعَلَّمُ … مِثْلَ …</a:t>
@@ -17961,6 +18103,7 @@
                   <a:srgbClr val="1B3B6F"/>
                 </a:solidFill>
                 <a:latin typeface="Amiri" pitchFamily="2" charset="-78"/>
+                <a:ea typeface="Amiri" pitchFamily="2" charset="-78"/>
                 <a:cs typeface="Amiri" pitchFamily="2" charset="-78"/>
               </a:rPr>
               <a:t>مَا المَهَارَاتُ الَّتِي تَتَعَلَّمُهَا فِي المَدْرَسَةِ؟</a:t>
@@ -18064,6 +18207,7 @@
                   <a:srgbClr val="1B3B6F"/>
                 </a:solidFill>
                 <a:latin typeface="Amiri" pitchFamily="2" charset="-78"/>
+                <a:ea typeface="Amiri" pitchFamily="2" charset="-78"/>
                 <a:cs typeface="Amiri" pitchFamily="2" charset="-78"/>
               </a:rPr>
               <a:t>نَعَمْ، لِأَنَّهُ … فَمَثَلًا …</a:t>
@@ -18140,6 +18284,7 @@
                   <a:srgbClr val="1B3B6F"/>
                 </a:solidFill>
                 <a:latin typeface="Amiri" pitchFamily="2" charset="-78"/>
+                <a:ea typeface="Amiri" pitchFamily="2" charset="-78"/>
                 <a:cs typeface="Amiri" pitchFamily="2" charset="-78"/>
               </a:rPr>
               <a:t>هَلِ التَّطَوُّعُ مُفِيدٌ لِلشَّبَابِ؟</a:t>
@@ -18243,6 +18388,7 @@
                   <a:srgbClr val="1B3B6F"/>
                 </a:solidFill>
                 <a:latin typeface="Amiri" pitchFamily="2" charset="-78"/>
+                <a:ea typeface="Amiri" pitchFamily="2" charset="-78"/>
                 <a:cs typeface="Amiri" pitchFamily="2" charset="-78"/>
               </a:rPr>
               <a:t>أَرَى أَنَّ … لٰكِنَّ …</a:t>
@@ -18319,6 +18465,7 @@
                   <a:srgbClr val="1B3B6F"/>
                 </a:solidFill>
                 <a:latin typeface="Amiri" pitchFamily="2" charset="-78"/>
+                <a:ea typeface="Amiri" pitchFamily="2" charset="-78"/>
                 <a:cs typeface="Amiri" pitchFamily="2" charset="-78"/>
               </a:rPr>
               <a:t>أَيُّهُمَا أَهَمُّ: الشَّهَادَةُ أَمِ الخِبْرَةُ؟</a:t>
@@ -18422,6 +18569,7 @@
                   <a:srgbClr val="1B3B6F"/>
                 </a:solidFill>
                 <a:latin typeface="Amiri" pitchFamily="2" charset="-78"/>
+                <a:ea typeface="Amiri" pitchFamily="2" charset="-78"/>
                 <a:cs typeface="Amiri" pitchFamily="2" charset="-78"/>
               </a:rPr>
               <a:t>بَعْدَ أَنْ أُنْهِيَ … سَأَدْرُسُ …</a:t>
@@ -18498,6 +18646,7 @@
                   <a:srgbClr val="1B3B6F"/>
                 </a:solidFill>
                 <a:latin typeface="Amiri" pitchFamily="2" charset="-78"/>
+                <a:ea typeface="Amiri" pitchFamily="2" charset="-78"/>
                 <a:cs typeface="Amiri" pitchFamily="2" charset="-78"/>
               </a:rPr>
               <a:t>مَا الطَّرِيقُ الَّذِي سَتَخْتَارُهُ بَعْدَ المَدْرَسَةِ؟</a:t>
@@ -18707,6 +18856,7 @@
                   <a:srgbClr val="D4AF37"/>
                 </a:solidFill>
                 <a:latin typeface="Amiri" pitchFamily="2" charset="-78"/>
+                <a:ea typeface="Amiri" pitchFamily="2" charset="-78"/>
                 <a:cs typeface="Amiri" pitchFamily="2" charset="-78"/>
               </a:rPr>
               <a:t>م</a:t>
@@ -19027,6 +19177,7 @@
                   <a:srgbClr val="8A6D1E"/>
                 </a:solidFill>
                 <a:latin typeface="Amiri" pitchFamily="2" charset="-78"/>
+                <a:ea typeface="Amiri" pitchFamily="2" charset="-78"/>
                 <a:cs typeface="Amiri" pitchFamily="2" charset="-78"/>
               </a:rPr>
               <a:t>التَّعْلِيمُ وَسُوقُ العَمَلِ</a:t>
@@ -19307,6 +19458,7 @@
                   <a:srgbClr val="1B3B6F"/>
                 </a:solidFill>
                 <a:latin typeface="Amiri" pitchFamily="2" charset="-78"/>
+                <a:ea typeface="Amiri" pitchFamily="2" charset="-78"/>
                 <a:cs typeface="Amiri" pitchFamily="2" charset="-78"/>
               </a:rPr>
               <a:t>صَحِيحٌ أَنَّ … غَيْرَ أَنَّ …</a:t>
@@ -19383,6 +19535,7 @@
                   <a:srgbClr val="1B3B6F"/>
                 </a:solidFill>
                 <a:latin typeface="Amiri" pitchFamily="2" charset="-78"/>
+                <a:ea typeface="Amiri" pitchFamily="2" charset="-78"/>
                 <a:cs typeface="Amiri" pitchFamily="2" charset="-78"/>
               </a:rPr>
               <a:t>هَلْ تُعِدُّ المَدَارِسُ الطُّلَّابَ لِسُوقِ العَمَلِ؟</a:t>
@@ -19486,6 +19639,7 @@
                   <a:srgbClr val="1B3B6F"/>
                 </a:solidFill>
                 <a:latin typeface="Amiri" pitchFamily="2" charset="-78"/>
+                <a:ea typeface="Amiri" pitchFamily="2" charset="-78"/>
                 <a:cs typeface="Amiri" pitchFamily="2" charset="-78"/>
               </a:rPr>
               <a:t>مِنْ نَاحِيَةٍ … وَمِنْ نَاحِيَةٍ أُخْرَى …</a:t>
@@ -19562,6 +19716,7 @@
                   <a:srgbClr val="1B3B6F"/>
                 </a:solidFill>
                 <a:latin typeface="Amiri" pitchFamily="2" charset="-78"/>
+                <a:ea typeface="Amiri" pitchFamily="2" charset="-78"/>
                 <a:cs typeface="Amiri" pitchFamily="2" charset="-78"/>
               </a:rPr>
               <a:t>هَلِ الدَّوْرَاتُ الإِلِكْتْرُونِيَّةُ تُغْنِي عَنِ الجَامِعَةِ؟</a:t>
@@ -19665,6 +19820,7 @@
                   <a:srgbClr val="1B3B6F"/>
                 </a:solidFill>
                 <a:latin typeface="Amiri" pitchFamily="2" charset="-78"/>
+                <a:ea typeface="Amiri" pitchFamily="2" charset="-78"/>
                 <a:cs typeface="Amiri" pitchFamily="2" charset="-78"/>
               </a:rPr>
               <a:t>لِأَنَّهُ … مِمَّا …</a:t>
@@ -19741,6 +19897,7 @@
                   <a:srgbClr val="1B3B6F"/>
                 </a:solidFill>
                 <a:latin typeface="Amiri" pitchFamily="2" charset="-78"/>
+                <a:ea typeface="Amiri" pitchFamily="2" charset="-78"/>
                 <a:cs typeface="Amiri" pitchFamily="2" charset="-78"/>
               </a:rPr>
               <a:t>لِمَاذَا يَخْتَارُ بَعْضُ الشَّبَابِ التَّدْرِيبَ المِهْنِيَّ؟</a:t>
@@ -19844,6 +20001,7 @@
                   <a:srgbClr val="1B3B6F"/>
                 </a:solidFill>
                 <a:latin typeface="Amiri" pitchFamily="2" charset="-78"/>
+                <a:ea typeface="Amiri" pitchFamily="2" charset="-78"/>
                 <a:cs typeface="Amiri" pitchFamily="2" charset="-78"/>
               </a:rPr>
               <a:t>كَانُوا … أَمَّا اليَوْمَ فَيَحْتَاجُونَ …</a:t>
@@ -19920,6 +20078,7 @@
                   <a:srgbClr val="1B3B6F"/>
                 </a:solidFill>
                 <a:latin typeface="Amiri" pitchFamily="2" charset="-78"/>
+                <a:ea typeface="Amiri" pitchFamily="2" charset="-78"/>
                 <a:cs typeface="Amiri" pitchFamily="2" charset="-78"/>
               </a:rPr>
               <a:t>كَيْفَ كَانَ الشَّبَابُ يَتَعَلَّمُونَ المِهَنَ فِي المَاضِي؟</a:t>
@@ -20023,6 +20182,7 @@
                   <a:srgbClr val="1B3B6F"/>
                 </a:solidFill>
                 <a:latin typeface="Amiri" pitchFamily="2" charset="-78"/>
+                <a:ea typeface="Amiri" pitchFamily="2" charset="-78"/>
                 <a:cs typeface="Amiri" pitchFamily="2" charset="-78"/>
               </a:rPr>
               <a:t>لَوِ اسْتَطَعْتُ، لَاخْتَرْتُ …</a:t>
@@ -20099,6 +20259,7 @@
                   <a:srgbClr val="1B3B6F"/>
                 </a:solidFill>
                 <a:latin typeface="Amiri" pitchFamily="2" charset="-78"/>
+                <a:ea typeface="Amiri" pitchFamily="2" charset="-78"/>
                 <a:cs typeface="Amiri" pitchFamily="2" charset="-78"/>
               </a:rPr>
               <a:t>لَوِ اسْتَطَعْتَ أَنْ تَتَعَلَّمَ أَيَّ مَهَارَةٍ فِي شَهْرٍ، مَاذَا تَخْتَارُ؟</a:t>
@@ -20308,6 +20469,7 @@
                   <a:srgbClr val="D4AF37"/>
                 </a:solidFill>
                 <a:latin typeface="Amiri" pitchFamily="2" charset="-78"/>
+                <a:ea typeface="Amiri" pitchFamily="2" charset="-78"/>
                 <a:cs typeface="Amiri" pitchFamily="2" charset="-78"/>
               </a:rPr>
               <a:t>م</a:t>
@@ -20628,6 +20790,7 @@
                   <a:srgbClr val="8A6D1E"/>
                 </a:solidFill>
                 <a:latin typeface="Amiri" pitchFamily="2" charset="-78"/>
+                <a:ea typeface="Amiri" pitchFamily="2" charset="-78"/>
                 <a:cs typeface="Amiri" pitchFamily="2" charset="-78"/>
               </a:rPr>
               <a:t>آدَابُ الصَّفِّ</a:t>
@@ -22159,6 +22322,7 @@
                   <a:srgbClr val="D4AF37"/>
                 </a:solidFill>
                 <a:latin typeface="Amiri" pitchFamily="2" charset="-78"/>
+                <a:ea typeface="Amiri" pitchFamily="2" charset="-78"/>
                 <a:cs typeface="Amiri" pitchFamily="2" charset="-78"/>
               </a:rPr>
               <a:t>م</a:t>
@@ -22479,6 +22643,7 @@
                   <a:srgbClr val="8A6D1E"/>
                 </a:solidFill>
                 <a:latin typeface="Amiri" pitchFamily="2" charset="-78"/>
+                <a:ea typeface="Amiri" pitchFamily="2" charset="-78"/>
                 <a:cs typeface="Amiri" pitchFamily="2" charset="-78"/>
               </a:rPr>
               <a:t>نَمُوذَجُ الإِجَابَةِ</a:t>
@@ -22721,6 +22886,7 @@
                   <a:srgbClr val="1B3B6F"/>
                 </a:solidFill>
                 <a:latin typeface="Amiri" pitchFamily="2" charset="-78"/>
+                <a:ea typeface="Amiri" pitchFamily="2" charset="-78"/>
                 <a:cs typeface="Amiri" pitchFamily="2" charset="-78"/>
               </a:rPr>
               <a:t>نَعَمْ، عِنْدِي شَهَادَةٌ فِي البِيَانُو.</a:t>
@@ -22797,6 +22963,7 @@
                   <a:srgbClr val="1B3B6F"/>
                 </a:solidFill>
                 <a:latin typeface="Amiri" pitchFamily="2" charset="-78"/>
+                <a:ea typeface="Amiri" pitchFamily="2" charset="-78"/>
                 <a:cs typeface="Amiri" pitchFamily="2" charset="-78"/>
               </a:rPr>
               <a:t>هَلْ عِنْدَكَ شَهَادَةٌ فِي شَيْءٍ؟</a:t>
@@ -22900,6 +23067,7 @@
                   <a:srgbClr val="1B3B6F"/>
                 </a:solidFill>
                 <a:latin typeface="Amiri" pitchFamily="2" charset="-78"/>
+                <a:ea typeface="Amiri" pitchFamily="2" charset="-78"/>
                 <a:cs typeface="Amiri" pitchFamily="2" charset="-78"/>
               </a:rPr>
               <a:t>مَهَارَتِي الأَقْوَى التَّوَاصُلُ مَعَ النَّاسِ.</a:t>
@@ -22976,6 +23144,7 @@
                   <a:srgbClr val="1B3B6F"/>
                 </a:solidFill>
                 <a:latin typeface="Amiri" pitchFamily="2" charset="-78"/>
+                <a:ea typeface="Amiri" pitchFamily="2" charset="-78"/>
                 <a:cs typeface="Amiri" pitchFamily="2" charset="-78"/>
               </a:rPr>
               <a:t>مَا مَهَارَتُكَ الأَقْوَى؟</a:t>
@@ -23079,6 +23248,7 @@
                   <a:srgbClr val="1B3B6F"/>
                 </a:solidFill>
                 <a:latin typeface="Amiri" pitchFamily="2" charset="-78"/>
+                <a:ea typeface="Amiri" pitchFamily="2" charset="-78"/>
                 <a:cs typeface="Amiri" pitchFamily="2" charset="-78"/>
               </a:rPr>
               <a:t>نَعَمْ، حَضَرْتُ دَوْرَةً فِي البَرْمَجَةِ.</a:t>
@@ -23155,6 +23325,7 @@
                   <a:srgbClr val="1B3B6F"/>
                 </a:solidFill>
                 <a:latin typeface="Amiri" pitchFamily="2" charset="-78"/>
+                <a:ea typeface="Amiri" pitchFamily="2" charset="-78"/>
                 <a:cs typeface="Amiri" pitchFamily="2" charset="-78"/>
               </a:rPr>
               <a:t>هَلْ حَضَرْتَ دَوْرَةً مِنْ قَبْلُ؟</a:t>
@@ -23258,6 +23429,7 @@
                   <a:srgbClr val="1B3B6F"/>
                 </a:solidFill>
                 <a:latin typeface="Amiri" pitchFamily="2" charset="-78"/>
+                <a:ea typeface="Amiri" pitchFamily="2" charset="-78"/>
                 <a:cs typeface="Amiri" pitchFamily="2" charset="-78"/>
               </a:rPr>
               <a:t>نَعَمْ، أَتَطَوَّعُ فِي مَكْتَبَةِ الحَيِّ يَوْمَ السَّبْتِ.</a:t>
@@ -23334,6 +23506,7 @@
                   <a:srgbClr val="1B3B6F"/>
                 </a:solidFill>
                 <a:latin typeface="Amiri" pitchFamily="2" charset="-78"/>
+                <a:ea typeface="Amiri" pitchFamily="2" charset="-78"/>
                 <a:cs typeface="Amiri" pitchFamily="2" charset="-78"/>
               </a:rPr>
               <a:t>هَلْ تَتَطَوَّعُ؟</a:t>
@@ -23437,6 +23610,7 @@
                   <a:srgbClr val="1B3B6F"/>
                 </a:solidFill>
                 <a:latin typeface="Amiri" pitchFamily="2" charset="-78"/>
+                <a:ea typeface="Amiri" pitchFamily="2" charset="-78"/>
                 <a:cs typeface="Amiri" pitchFamily="2" charset="-78"/>
               </a:rPr>
               <a:t>سَأَدْرُسُ الهَنْدَسَةَ فِي الجَامِعَةِ.</a:t>
@@ -23513,6 +23687,7 @@
                   <a:srgbClr val="1B3B6F"/>
                 </a:solidFill>
                 <a:latin typeface="Amiri" pitchFamily="2" charset="-78"/>
+                <a:ea typeface="Amiri" pitchFamily="2" charset="-78"/>
                 <a:cs typeface="Amiri" pitchFamily="2" charset="-78"/>
               </a:rPr>
               <a:t>مَاذَا سَتَدْرُسُ بَعْدَ المَدْرَسَةِ؟</a:t>
@@ -23722,6 +23897,7 @@
                   <a:srgbClr val="D4AF37"/>
                 </a:solidFill>
                 <a:latin typeface="Amiri" pitchFamily="2" charset="-78"/>
+                <a:ea typeface="Amiri" pitchFamily="2" charset="-78"/>
                 <a:cs typeface="Amiri" pitchFamily="2" charset="-78"/>
               </a:rPr>
               <a:t>م</a:t>
@@ -24042,6 +24218,7 @@
                   <a:srgbClr val="8A6D1E"/>
                 </a:solidFill>
                 <a:latin typeface="Amiri" pitchFamily="2" charset="-78"/>
+                <a:ea typeface="Amiri" pitchFamily="2" charset="-78"/>
                 <a:cs typeface="Amiri" pitchFamily="2" charset="-78"/>
               </a:rPr>
               <a:t>نَمُوذَجُ الإِجَابَةِ</a:t>
@@ -24284,6 +24461,7 @@
                   <a:srgbClr val="1B3B6F"/>
                 </a:solidFill>
                 <a:latin typeface="Amiri" pitchFamily="2" charset="-78"/>
+                <a:ea typeface="Amiri" pitchFamily="2" charset="-78"/>
                 <a:cs typeface="Amiri" pitchFamily="2" charset="-78"/>
               </a:rPr>
               <a:t>الدَّوْرَةُ الَّتِي حَضَرْتُهَا كَانَتْ فِي التَّصْوِيرِ، وَاسْتَمَرَّتْ شَهْرًا، وَتَعَلَّمْتُ فِيهَا اسْتِخْدَامَ الضَّوْءِ الطَّبِيعِيِّ.</a:t>
@@ -24360,6 +24538,7 @@
                   <a:srgbClr val="1B3B6F"/>
                 </a:solidFill>
                 <a:latin typeface="Amiri" pitchFamily="2" charset="-78"/>
+                <a:ea typeface="Amiri" pitchFamily="2" charset="-78"/>
                 <a:cs typeface="Amiri" pitchFamily="2" charset="-78"/>
               </a:rPr>
               <a:t>صِفْ دَوْرَةً حَضَرْتَهَا.</a:t>
@@ -24463,6 +24642,7 @@
                   <a:srgbClr val="1B3B6F"/>
                 </a:solidFill>
                 <a:latin typeface="Amiri" pitchFamily="2" charset="-78"/>
+                <a:ea typeface="Amiri" pitchFamily="2" charset="-78"/>
                 <a:cs typeface="Amiri" pitchFamily="2" charset="-78"/>
               </a:rPr>
               <a:t>أَتَعَلَّمُ مَهَارَاتٍ كَثِيرَةً، مِثْلَ العَمَلِ الجَمَاعِيِّ فِي المَشَارِيعِ، وَالتَّقْدِيمِ أَمَامَ الصَّفِّ.</a:t>
@@ -24539,6 +24719,7 @@
                   <a:srgbClr val="1B3B6F"/>
                 </a:solidFill>
                 <a:latin typeface="Amiri" pitchFamily="2" charset="-78"/>
+                <a:ea typeface="Amiri" pitchFamily="2" charset="-78"/>
                 <a:cs typeface="Amiri" pitchFamily="2" charset="-78"/>
               </a:rPr>
               <a:t>مَا المَهَارَاتُ الَّتِي تَتَعَلَّمُهَا فِي المَدْرَسَةِ؟</a:t>
@@ -24642,6 +24823,7 @@
                   <a:srgbClr val="1B3B6F"/>
                 </a:solidFill>
                 <a:latin typeface="Amiri" pitchFamily="2" charset="-78"/>
+                <a:ea typeface="Amiri" pitchFamily="2" charset="-78"/>
                 <a:cs typeface="Amiri" pitchFamily="2" charset="-78"/>
               </a:rPr>
               <a:t>نَعَمْ، لِأَنَّهُ يُعْطِيهِمْ خِبْرَةً وَثِقَةً؛ فَمَثَلًا تَعَلَّمْتُ الصَّبْرَ عِنْدَمَا تَطَوَّعْتُ مَعَ الأَطْفَالِ.</a:t>
@@ -24718,6 +24900,7 @@
                   <a:srgbClr val="1B3B6F"/>
                 </a:solidFill>
                 <a:latin typeface="Amiri" pitchFamily="2" charset="-78"/>
+                <a:ea typeface="Amiri" pitchFamily="2" charset="-78"/>
                 <a:cs typeface="Amiri" pitchFamily="2" charset="-78"/>
               </a:rPr>
               <a:t>هَلِ التَّطَوُّعُ مُفِيدٌ لِلشَّبَابِ؟</a:t>
@@ -24821,6 +25004,7 @@
                   <a:srgbClr val="1B3B6F"/>
                 </a:solidFill>
                 <a:latin typeface="Amiri" pitchFamily="2" charset="-78"/>
+                <a:ea typeface="Amiri" pitchFamily="2" charset="-78"/>
                 <a:cs typeface="Amiri" pitchFamily="2" charset="-78"/>
               </a:rPr>
               <a:t>أَرَى أَنَّ الشَّهَادَةَ تَفْتَحُ البَابَ، لٰكِنَّ الخِبْرَةَ هِيَ الَّتِي تَجْعَلُكَ تَنْجَحُ فِي العَمَلِ.</a:t>
@@ -24897,6 +25081,7 @@
                   <a:srgbClr val="1B3B6F"/>
                 </a:solidFill>
                 <a:latin typeface="Amiri" pitchFamily="2" charset="-78"/>
+                <a:ea typeface="Amiri" pitchFamily="2" charset="-78"/>
                 <a:cs typeface="Amiri" pitchFamily="2" charset="-78"/>
               </a:rPr>
               <a:t>أَيُّهُمَا أَهَمُّ: الشَّهَادَةُ أَمِ الخِبْرَةُ؟</a:t>
@@ -25000,6 +25185,7 @@
                   <a:srgbClr val="1B3B6F"/>
                 </a:solidFill>
                 <a:latin typeface="Amiri" pitchFamily="2" charset="-78"/>
+                <a:ea typeface="Amiri" pitchFamily="2" charset="-78"/>
                 <a:cs typeface="Amiri" pitchFamily="2" charset="-78"/>
               </a:rPr>
               <a:t>بَعْدَ أَنْ أُنْهِيَ الثَّانَوِيَّةَ، سَأَدْرُسُ الصَّيْدَلَةَ، ثُمَّ سَأَتَدَرَّبُ فِي صَيْدَلِيَّةٍ قَبْلَ أَنْ أَعْمَلَ.</a:t>
@@ -25076,6 +25262,7 @@
                   <a:srgbClr val="1B3B6F"/>
                 </a:solidFill>
                 <a:latin typeface="Amiri" pitchFamily="2" charset="-78"/>
+                <a:ea typeface="Amiri" pitchFamily="2" charset="-78"/>
                 <a:cs typeface="Amiri" pitchFamily="2" charset="-78"/>
               </a:rPr>
               <a:t>مَا الطَّرِيقُ الَّذِي سَتَخْتَارُهُ بَعْدَ المَدْرَسَةِ؟</a:t>
@@ -25285,6 +25472,7 @@
                   <a:srgbClr val="D4AF37"/>
                 </a:solidFill>
                 <a:latin typeface="Amiri" pitchFamily="2" charset="-78"/>
+                <a:ea typeface="Amiri" pitchFamily="2" charset="-78"/>
                 <a:cs typeface="Amiri" pitchFamily="2" charset="-78"/>
               </a:rPr>
               <a:t>م</a:t>
@@ -25605,6 +25793,7 @@
                   <a:srgbClr val="8A6D1E"/>
                 </a:solidFill>
                 <a:latin typeface="Amiri" pitchFamily="2" charset="-78"/>
+                <a:ea typeface="Amiri" pitchFamily="2" charset="-78"/>
                 <a:cs typeface="Amiri" pitchFamily="2" charset="-78"/>
               </a:rPr>
               <a:t>نَمُوذَجُ الإِجَابَةِ</a:t>
@@ -25847,6 +26036,7 @@
                   <a:srgbClr val="1B3B6F"/>
                 </a:solidFill>
                 <a:latin typeface="Amiri" pitchFamily="2" charset="-78"/>
+                <a:ea typeface="Amiri" pitchFamily="2" charset="-78"/>
                 <a:cs typeface="Amiri" pitchFamily="2" charset="-78"/>
               </a:rPr>
               <a:t>صَحِيحٌ أَنَّهَا تُعَلِّمُ المَعْرِفَةَ، غَيْرَ أَنَّهَا نَادِرًا مَا تُعَلِّمُ مَهَارَاتٍ عَمَلِيَّةً كَإِدَارَةِ المَالِ أَوْ كِتَابَةِ السِّيرَةِ الذَّاتِيَّةِ.</a:t>
@@ -25923,6 +26113,7 @@
                   <a:srgbClr val="1B3B6F"/>
                 </a:solidFill>
                 <a:latin typeface="Amiri" pitchFamily="2" charset="-78"/>
+                <a:ea typeface="Amiri" pitchFamily="2" charset="-78"/>
                 <a:cs typeface="Amiri" pitchFamily="2" charset="-78"/>
               </a:rPr>
               <a:t>هَلْ تُعِدُّ المَدَارِسُ الطُّلَّابَ لِسُوقِ العَمَلِ؟</a:t>
@@ -26026,6 +26217,7 @@
                   <a:srgbClr val="1B3B6F"/>
                 </a:solidFill>
                 <a:latin typeface="Amiri" pitchFamily="2" charset="-78"/>
+                <a:ea typeface="Amiri" pitchFamily="2" charset="-78"/>
                 <a:cs typeface="Amiri" pitchFamily="2" charset="-78"/>
               </a:rPr>
               <a:t>مِنْ نَاحِيَةٍ، هِيَ أَرْخَصُ وَأَكْثَرُ مُرُونَةً، وَمِنْ نَاحِيَةٍ أُخْرَى، لَا تُقَدِّمُ الحَيَاةَ الجَامِعِيَّةَ وَالعَلَاقَاتِ الَّتِي تُبْنَى هُنَاكَ.</a:t>
@@ -26102,6 +26294,7 @@
                   <a:srgbClr val="1B3B6F"/>
                 </a:solidFill>
                 <a:latin typeface="Amiri" pitchFamily="2" charset="-78"/>
+                <a:ea typeface="Amiri" pitchFamily="2" charset="-78"/>
                 <a:cs typeface="Amiri" pitchFamily="2" charset="-78"/>
               </a:rPr>
               <a:t>هَلِ الدَّوْرَاتُ الإِلِكْتْرُونِيَّةُ تُغْنِي عَنِ الجَامِعَةِ؟</a:t>
@@ -26205,6 +26398,7 @@
                   <a:srgbClr val="1B3B6F"/>
                 </a:solidFill>
                 <a:latin typeface="Amiri" pitchFamily="2" charset="-78"/>
+                <a:ea typeface="Amiri" pitchFamily="2" charset="-78"/>
                 <a:cs typeface="Amiri" pitchFamily="2" charset="-78"/>
               </a:rPr>
               <a:t>لِأَنَّهُ يُتِيحُ لَهُمْ أَنْ يَكْسِبُوا المَالَ وَهُمْ يَتَعَلَّمُونَ، مِمَّا يُجَنِّبُهُمْ دُيُونَ الجَامِعَةِ.</a:t>
@@ -26281,6 +26475,7 @@
                   <a:srgbClr val="1B3B6F"/>
                 </a:solidFill>
                 <a:latin typeface="Amiri" pitchFamily="2" charset="-78"/>
+                <a:ea typeface="Amiri" pitchFamily="2" charset="-78"/>
                 <a:cs typeface="Amiri" pitchFamily="2" charset="-78"/>
               </a:rPr>
               <a:t>لِمَاذَا يَخْتَارُ بَعْضُ الشَّبَابِ التَّدْرِيبَ المِهْنِيَّ؟</a:t>
@@ -26490,6 +26685,7 @@
                   <a:srgbClr val="D4AF37"/>
                 </a:solidFill>
                 <a:latin typeface="Amiri" pitchFamily="2" charset="-78"/>
+                <a:ea typeface="Amiri" pitchFamily="2" charset="-78"/>
                 <a:cs typeface="Amiri" pitchFamily="2" charset="-78"/>
               </a:rPr>
               <a:t>م</a:t>
@@ -26810,6 +27006,7 @@
                   <a:srgbClr val="8A6D1E"/>
                 </a:solidFill>
                 <a:latin typeface="Amiri" pitchFamily="2" charset="-78"/>
+                <a:ea typeface="Amiri" pitchFamily="2" charset="-78"/>
                 <a:cs typeface="Amiri" pitchFamily="2" charset="-78"/>
               </a:rPr>
               <a:t>نَمُوذَجُ الإِجَابَةِ</a:t>
@@ -27052,6 +27249,7 @@
                   <a:srgbClr val="1B3B6F"/>
                 </a:solidFill>
                 <a:latin typeface="Amiri" pitchFamily="2" charset="-78"/>
+                <a:ea typeface="Amiri" pitchFamily="2" charset="-78"/>
                 <a:cs typeface="Amiri" pitchFamily="2" charset="-78"/>
               </a:rPr>
               <a:t>كَانُوا يَتَعَلَّمُونَ مِنْ آبَائِهِمْ فِي الوَرْشَةِ أَوِ الحَقْلِ، أَمَّا اليَوْمَ فَيَحْتَاجُونَ إِلَى شَهَادَاتٍ رَسْمِيَّةٍ.</a:t>
@@ -27128,6 +27326,7 @@
                   <a:srgbClr val="1B3B6F"/>
                 </a:solidFill>
                 <a:latin typeface="Amiri" pitchFamily="2" charset="-78"/>
+                <a:ea typeface="Amiri" pitchFamily="2" charset="-78"/>
                 <a:cs typeface="Amiri" pitchFamily="2" charset="-78"/>
               </a:rPr>
               <a:t>كَيْفَ كَانَ الشَّبَابُ يَتَعَلَّمُونَ المِهَنَ فِي المَاضِي؟</a:t>
@@ -27231,6 +27430,7 @@
                   <a:srgbClr val="1B3B6F"/>
                 </a:solidFill>
                 <a:latin typeface="Amiri" pitchFamily="2" charset="-78"/>
+                <a:ea typeface="Amiri" pitchFamily="2" charset="-78"/>
                 <a:cs typeface="Amiri" pitchFamily="2" charset="-78"/>
               </a:rPr>
               <a:t>لَوِ اسْتَطَعْتُ، لَاخْتَرْتُ لُغَةَ الإِشَارَةِ، لِكَيْ أَتَوَاصَلَ مَعَ الصُّمِّ فِي المُسْتَشْفَى الَّذِي أَتَطَوَّعُ فِيهِ.</a:t>
@@ -27310,6 +27510,7 @@
                   <a:srgbClr val="1B3B6F"/>
                 </a:solidFill>
                 <a:latin typeface="Amiri" pitchFamily="2" charset="-78"/>
+                <a:ea typeface="Amiri" pitchFamily="2" charset="-78"/>
                 <a:cs typeface="Amiri" pitchFamily="2" charset="-78"/>
               </a:rPr>
               <a:t>لَوِ اسْتَطَعْتَ أَنْ تَتَعَلَّمَ أَيَّ مَهَارَةٍ فِي شَهْرٍ، مَاذَا تَخْتَارُ؟</a:t>
@@ -27519,6 +27720,7 @@
                   <a:srgbClr val="D4AF37"/>
                 </a:solidFill>
                 <a:latin typeface="Amiri" pitchFamily="2" charset="-78"/>
+                <a:ea typeface="Amiri" pitchFamily="2" charset="-78"/>
                 <a:cs typeface="Amiri" pitchFamily="2" charset="-78"/>
               </a:rPr>
               <a:t>م</a:t>
@@ -27839,6 +28041,7 @@
                   <a:srgbClr val="8A6D1E"/>
                 </a:solidFill>
                 <a:latin typeface="Amiri" pitchFamily="2" charset="-78"/>
+                <a:ea typeface="Amiri" pitchFamily="2" charset="-78"/>
                 <a:cs typeface="Amiri" pitchFamily="2" charset="-78"/>
               </a:rPr>
               <a:t>قَيِّمْ عَمَلَكَ</a:t>
@@ -29083,6 +29286,7 @@
                   <a:srgbClr val="FFFFFF"/>
                 </a:solidFill>
                 <a:latin typeface="Amiri" pitchFamily="2" charset="-78"/>
+                <a:ea typeface="Amiri" pitchFamily="2" charset="-78"/>
                 <a:cs typeface="Amiri" pitchFamily="2" charset="-78"/>
               </a:rPr>
               <a:t>أَحْسَنْتُمْ! إِلَى اللِّقَاءِ</a:t>
@@ -29235,6 +29439,7 @@
                   <a:srgbClr val="D4AF37"/>
                 </a:solidFill>
                 <a:latin typeface="Amiri" pitchFamily="2" charset="-78"/>
+                <a:ea typeface="Amiri" pitchFamily="2" charset="-78"/>
                 <a:cs typeface="Amiri" pitchFamily="2" charset="-78"/>
               </a:rPr>
               <a:t>وَرْشَةُ الكِتَابَةِ</a:t>
@@ -29368,6 +29573,7 @@
                   <a:srgbClr val="D4AF37"/>
                 </a:solidFill>
                 <a:latin typeface="Amiri" pitchFamily="2" charset="-78"/>
+                <a:ea typeface="Amiri" pitchFamily="2" charset="-78"/>
                 <a:cs typeface="Amiri" pitchFamily="2" charset="-78"/>
               </a:rPr>
               <a:t>م</a:t>
@@ -29688,6 +29894,7 @@
                   <a:srgbClr val="8A6D1E"/>
                 </a:solidFill>
                 <a:latin typeface="Amiri" pitchFamily="2" charset="-78"/>
+                <a:ea typeface="Amiri" pitchFamily="2" charset="-78"/>
                 <a:cs typeface="Amiri" pitchFamily="2" charset="-78"/>
               </a:rPr>
               <a:t>خَرِيطَةُ الوَرْشَةِ</a:t>
@@ -30002,6 +30209,7 @@
                   <a:srgbClr val="1B3B6F"/>
                 </a:solidFill>
                 <a:latin typeface="Amiri" pitchFamily="2" charset="-78"/>
+                <a:ea typeface="Amiri" pitchFamily="2" charset="-78"/>
                 <a:cs typeface="Amiri" pitchFamily="2" charset="-78"/>
               </a:rPr>
               <a:t>كَيْفَ</a:t>
@@ -30278,6 +30486,7 @@
                   <a:srgbClr val="1E6B52"/>
                 </a:solidFill>
                 <a:latin typeface="Amiri" pitchFamily="2" charset="-78"/>
+                <a:ea typeface="Amiri" pitchFamily="2" charset="-78"/>
                 <a:cs typeface="Amiri" pitchFamily="2" charset="-78"/>
               </a:rPr>
               <a:t>تَمْثِيلُ الدَّوْرِ</a:t>
@@ -30554,6 +30763,7 @@
                   <a:srgbClr val="8A6D1E"/>
                 </a:solidFill>
                 <a:latin typeface="Amiri" pitchFamily="2" charset="-78"/>
+                <a:ea typeface="Amiri" pitchFamily="2" charset="-78"/>
                 <a:cs typeface="Amiri" pitchFamily="2" charset="-78"/>
               </a:rPr>
               <a:t>النَّمُوذَجُ</a:t>
@@ -30830,6 +31040,7 @@
                   <a:srgbClr val="1E6B52"/>
                 </a:solidFill>
                 <a:latin typeface="Amiri" pitchFamily="2" charset="-78"/>
+                <a:ea typeface="Amiri" pitchFamily="2" charset="-78"/>
                 <a:cs typeface="Amiri" pitchFamily="2" charset="-78"/>
               </a:rPr>
               <a:t>المُحَادَثَةُ</a:t>
@@ -31106,6 +31317,7 @@
                   <a:srgbClr val="8A6D1E"/>
                 </a:solidFill>
                 <a:latin typeface="Amiri" pitchFamily="2" charset="-78"/>
+                <a:ea typeface="Amiri" pitchFamily="2" charset="-78"/>
                 <a:cs typeface="Amiri" pitchFamily="2" charset="-78"/>
               </a:rPr>
               <a:t>قَيِّمْ</a:t>
@@ -31349,6 +31561,7 @@
                   <a:srgbClr val="D4AF37"/>
                 </a:solidFill>
                 <a:latin typeface="Amiri" pitchFamily="2" charset="-78"/>
+                <a:ea typeface="Amiri" pitchFamily="2" charset="-78"/>
                 <a:cs typeface="Amiri" pitchFamily="2" charset="-78"/>
               </a:rPr>
               <a:t>م</a:t>
@@ -31669,6 +31882,7 @@
                   <a:srgbClr val="8A6D1E"/>
                 </a:solidFill>
                 <a:latin typeface="Amiri" pitchFamily="2" charset="-78"/>
+                <a:ea typeface="Amiri" pitchFamily="2" charset="-78"/>
                 <a:cs typeface="Amiri" pitchFamily="2" charset="-78"/>
               </a:rPr>
               <a:t>امْتِحَانُ التَّحَدُّثِ</a:t>
@@ -32293,6 +32507,7 @@
                   <a:srgbClr val="1B3B6F"/>
                 </a:solidFill>
                 <a:latin typeface="Amiri" pitchFamily="2" charset="-78"/>
+                <a:ea typeface="Amiri" pitchFamily="2" charset="-78"/>
                 <a:cs typeface="Amiri" pitchFamily="2" charset="-78"/>
               </a:rPr>
               <a:t>عَفْوًا، هَلْ يُمْكِنُ أَنْ تُعِيدَ السُّؤَالَ؟</a:t>
@@ -32392,6 +32607,7 @@
                   <a:srgbClr val="1B3B6F"/>
                 </a:solidFill>
                 <a:latin typeface="Amiri" pitchFamily="2" charset="-78"/>
+                <a:ea typeface="Amiri" pitchFamily="2" charset="-78"/>
                 <a:cs typeface="Amiri" pitchFamily="2" charset="-78"/>
               </a:rPr>
               <a:t>لَحْظَةً، دَعْنِي أُفَكِّرُ …</a:t>
@@ -32491,6 +32707,7 @@
                   <a:srgbClr val="1B3B6F"/>
                 </a:solidFill>
                 <a:latin typeface="Amiri" pitchFamily="2" charset="-78"/>
+                <a:ea typeface="Amiri" pitchFamily="2" charset="-78"/>
                 <a:cs typeface="Amiri" pitchFamily="2" charset="-78"/>
               </a:rPr>
               <a:t>أَقْصِدُ …</a:t>
@@ -32662,6 +32879,7 @@
                   <a:srgbClr val="D4AF37"/>
                 </a:solidFill>
                 <a:latin typeface="Amiri" pitchFamily="2" charset="-78"/>
+                <a:ea typeface="Amiri" pitchFamily="2" charset="-78"/>
                 <a:cs typeface="Amiri" pitchFamily="2" charset="-78"/>
               </a:rPr>
               <a:t>م</a:t>
@@ -32982,6 +33200,7 @@
                   <a:srgbClr val="8A6D1E"/>
                 </a:solidFill>
                 <a:latin typeface="Amiri" pitchFamily="2" charset="-78"/>
+                <a:ea typeface="Amiri" pitchFamily="2" charset="-78"/>
                 <a:cs typeface="Amiri" pitchFamily="2" charset="-78"/>
               </a:rPr>
               <a:t>الشَّهَادَاتُ وَالدَّوْرَاتُ</a:t>
@@ -33285,6 +33504,7 @@
                   <a:srgbClr val="1B3B6F"/>
                 </a:solidFill>
                 <a:latin typeface="Amiri" pitchFamily="2" charset="-78"/>
+                <a:ea typeface="Amiri" pitchFamily="2" charset="-78"/>
                 <a:cs typeface="Amiri" pitchFamily="2" charset="-78"/>
               </a:rPr>
               <a:t>شَهَادَةٌ</a:t>
@@ -33442,6 +33662,7 @@
                   <a:srgbClr val="1B3B6F"/>
                 </a:solidFill>
                 <a:latin typeface="Amiri" pitchFamily="2" charset="-78"/>
+                <a:ea typeface="Amiri" pitchFamily="2" charset="-78"/>
                 <a:cs typeface="Amiri" pitchFamily="2" charset="-78"/>
               </a:rPr>
               <a:t>الشَّهَادَةُ الثَّانَوِيَّةُ</a:t>
@@ -33545,6 +33766,7 @@
                   <a:srgbClr val="1B3B6F"/>
                 </a:solidFill>
                 <a:latin typeface="Amiri" pitchFamily="2" charset="-78"/>
+                <a:ea typeface="Amiri" pitchFamily="2" charset="-78"/>
                 <a:cs typeface="Amiri" pitchFamily="2" charset="-78"/>
               </a:rPr>
               <a:t>شَهَادَاتٌ</a:t>
@@ -33810,6 +34032,7 @@
                   <a:srgbClr val="1B3B6F"/>
                 </a:solidFill>
                 <a:latin typeface="Amiri" pitchFamily="2" charset="-78"/>
+                <a:ea typeface="Amiri" pitchFamily="2" charset="-78"/>
                 <a:cs typeface="Amiri" pitchFamily="2" charset="-78"/>
               </a:rPr>
               <a:t>دَوْرَةٌ</a:t>
@@ -33967,6 +34190,7 @@
                   <a:srgbClr val="1B3B6F"/>
                 </a:solidFill>
                 <a:latin typeface="Amiri" pitchFamily="2" charset="-78"/>
+                <a:ea typeface="Amiri" pitchFamily="2" charset="-78"/>
                 <a:cs typeface="Amiri" pitchFamily="2" charset="-78"/>
               </a:rPr>
               <a:t>دَوْرَةٌ إِلِكْتْرُونِيَّةٌ</a:t>
@@ -34070,6 +34294,7 @@
                   <a:srgbClr val="1B3B6F"/>
                 </a:solidFill>
                 <a:latin typeface="Amiri" pitchFamily="2" charset="-78"/>
+                <a:ea typeface="Amiri" pitchFamily="2" charset="-78"/>
                 <a:cs typeface="Amiri" pitchFamily="2" charset="-78"/>
               </a:rPr>
               <a:t>دَوْرَةٌ تَدْرِيبِيَّةٌ</a:t>
@@ -34173,6 +34398,7 @@
                   <a:srgbClr val="1B3B6F"/>
                 </a:solidFill>
                 <a:latin typeface="Amiri" pitchFamily="2" charset="-78"/>
+                <a:ea typeface="Amiri" pitchFamily="2" charset="-78"/>
                 <a:cs typeface="Amiri" pitchFamily="2" charset="-78"/>
               </a:rPr>
               <a:t>دَوْرَاتٌ</a:t>
@@ -34438,6 +34664,7 @@
                   <a:srgbClr val="1B3B6F"/>
                 </a:solidFill>
                 <a:latin typeface="Amiri" pitchFamily="2" charset="-78"/>
+                <a:ea typeface="Amiri" pitchFamily="2" charset="-78"/>
                 <a:cs typeface="Amiri" pitchFamily="2" charset="-78"/>
               </a:rPr>
               <a:t>تَدْرِيبٌ</a:t>
@@ -34595,6 +34822,7 @@
                   <a:srgbClr val="1B3B6F"/>
                 </a:solidFill>
                 <a:latin typeface="Amiri" pitchFamily="2" charset="-78"/>
+                <a:ea typeface="Amiri" pitchFamily="2" charset="-78"/>
                 <a:cs typeface="Amiri" pitchFamily="2" charset="-78"/>
               </a:rPr>
               <a:t>مُتَدَرِّبٌ · مُتَدَرِّبَةٌ</a:t>
@@ -34698,6 +34926,7 @@
                   <a:srgbClr val="1B3B6F"/>
                 </a:solidFill>
                 <a:latin typeface="Amiri" pitchFamily="2" charset="-78"/>
+                <a:ea typeface="Amiri" pitchFamily="2" charset="-78"/>
                 <a:cs typeface="Amiri" pitchFamily="2" charset="-78"/>
               </a:rPr>
               <a:t>أَتَدَرَّبُ</a:t>
@@ -34963,6 +35192,7 @@
                   <a:srgbClr val="1B3B6F"/>
                 </a:solidFill>
                 <a:latin typeface="Amiri" pitchFamily="2" charset="-78"/>
+                <a:ea typeface="Amiri" pitchFamily="2" charset="-78"/>
                 <a:cs typeface="Amiri" pitchFamily="2" charset="-78"/>
               </a:rPr>
               <a:t>تَدْرِيبٌ مِهْنِيٌّ</a:t>
@@ -35120,6 +35350,7 @@
                   <a:srgbClr val="1B3B6F"/>
                 </a:solidFill>
                 <a:latin typeface="Amiri" pitchFamily="2" charset="-78"/>
+                <a:ea typeface="Amiri" pitchFamily="2" charset="-78"/>
                 <a:cs typeface="Amiri" pitchFamily="2" charset="-78"/>
               </a:rPr>
               <a:t>خِبْرَةُ عَمَلٍ</a:t>
@@ -35223,6 +35454,7 @@
                   <a:srgbClr val="1B3B6F"/>
                 </a:solidFill>
                 <a:latin typeface="Amiri" pitchFamily="2" charset="-78"/>
+                <a:ea typeface="Amiri" pitchFamily="2" charset="-78"/>
                 <a:cs typeface="Amiri" pitchFamily="2" charset="-78"/>
               </a:rPr>
               <a:t>تَلْمَذَةٌ مِهْنِيَّةٌ</a:t>
@@ -35488,6 +35720,7 @@
                   <a:srgbClr val="1B3B6F"/>
                 </a:solidFill>
                 <a:latin typeface="Amiri" pitchFamily="2" charset="-78"/>
+                <a:ea typeface="Amiri" pitchFamily="2" charset="-78"/>
                 <a:cs typeface="Amiri" pitchFamily="2" charset="-78"/>
               </a:rPr>
               <a:t>مَهَارَةٌ</a:t>
@@ -35645,6 +35878,7 @@
                   <a:srgbClr val="1B3B6F"/>
                 </a:solidFill>
                 <a:latin typeface="Amiri" pitchFamily="2" charset="-78"/>
+                <a:ea typeface="Amiri" pitchFamily="2" charset="-78"/>
                 <a:cs typeface="Amiri" pitchFamily="2" charset="-78"/>
               </a:rPr>
               <a:t>مَاهِرٌ · مَاهِرَةٌ</a:t>
@@ -35748,6 +35982,7 @@
                   <a:srgbClr val="1B3B6F"/>
                 </a:solidFill>
                 <a:latin typeface="Amiri" pitchFamily="2" charset="-78"/>
+                <a:ea typeface="Amiri" pitchFamily="2" charset="-78"/>
                 <a:cs typeface="Amiri" pitchFamily="2" charset="-78"/>
               </a:rPr>
               <a:t>مَهَارَاتٌ</a:t>
@@ -36013,6 +36248,7 @@
                   <a:srgbClr val="1B3B6F"/>
                 </a:solidFill>
                 <a:latin typeface="Amiri" pitchFamily="2" charset="-78"/>
+                <a:ea typeface="Amiri" pitchFamily="2" charset="-78"/>
                 <a:cs typeface="Amiri" pitchFamily="2" charset="-78"/>
               </a:rPr>
               <a:t>التَّوَاصُلُ · العَمَلُ الجَمَاعِيُّ</a:t>
@@ -36170,6 +36406,7 @@
                   <a:srgbClr val="1B3B6F"/>
                 </a:solidFill>
                 <a:latin typeface="Amiri" pitchFamily="2" charset="-78"/>
+                <a:ea typeface="Amiri" pitchFamily="2" charset="-78"/>
                 <a:cs typeface="Amiri" pitchFamily="2" charset="-78"/>
               </a:rPr>
               <a:t>القِيَادَةُ</a:t>
@@ -36273,6 +36510,7 @@
                   <a:srgbClr val="1B3B6F"/>
                 </a:solidFill>
                 <a:latin typeface="Amiri" pitchFamily="2" charset="-78"/>
+                <a:ea typeface="Amiri" pitchFamily="2" charset="-78"/>
                 <a:cs typeface="Amiri" pitchFamily="2" charset="-78"/>
               </a:rPr>
               <a:t>حَلُّ المُشْكِلَاتِ</a:t>
@@ -36406,6 +36644,7 @@
                   <a:srgbClr val="D4AF37"/>
                 </a:solidFill>
                 <a:latin typeface="Amiri" pitchFamily="2" charset="-78"/>
+                <a:ea typeface="Amiri" pitchFamily="2" charset="-78"/>
                 <a:cs typeface="Amiri" pitchFamily="2" charset="-78"/>
               </a:rPr>
               <a:t>م</a:t>
@@ -36726,6 +36965,7 @@
                   <a:srgbClr val="8A6D1E"/>
                 </a:solidFill>
                 <a:latin typeface="Amiri" pitchFamily="2" charset="-78"/>
+                <a:ea typeface="Amiri" pitchFamily="2" charset="-78"/>
                 <a:cs typeface="Amiri" pitchFamily="2" charset="-78"/>
               </a:rPr>
               <a:t>المَهَارَاتُ الَّتِي أَحْتَاجُ إِلَيْهَا</a:t>
@@ -37029,6 +37269,7 @@
                   <a:srgbClr val="1B3B6F"/>
                 </a:solidFill>
                 <a:latin typeface="Amiri" pitchFamily="2" charset="-78"/>
+                <a:ea typeface="Amiri" pitchFamily="2" charset="-78"/>
                 <a:cs typeface="Amiri" pitchFamily="2" charset="-78"/>
               </a:rPr>
               <a:t>أَحْصُلُ عَلَى …</a:t>
@@ -37186,6 +37427,7 @@
                   <a:srgbClr val="1B3B6F"/>
                 </a:solidFill>
                 <a:latin typeface="Amiri" pitchFamily="2" charset="-78"/>
+                <a:ea typeface="Amiri" pitchFamily="2" charset="-78"/>
                 <a:cs typeface="Amiri" pitchFamily="2" charset="-78"/>
               </a:rPr>
               <a:t>الحُصُولُ عَلَى</a:t>
@@ -37289,6 +37531,7 @@
                   <a:srgbClr val="1B3B6F"/>
                 </a:solidFill>
                 <a:latin typeface="Amiri" pitchFamily="2" charset="-78"/>
+                <a:ea typeface="Amiri" pitchFamily="2" charset="-78"/>
                 <a:cs typeface="Amiri" pitchFamily="2" charset="-78"/>
               </a:rPr>
               <a:t>حَصَلْتُ عَلَى</a:t>
@@ -37554,6 +37797,7 @@
                   <a:srgbClr val="1B3B6F"/>
                 </a:solidFill>
                 <a:latin typeface="Amiri" pitchFamily="2" charset="-78"/>
+                <a:ea typeface="Amiri" pitchFamily="2" charset="-78"/>
                 <a:cs typeface="Amiri" pitchFamily="2" charset="-78"/>
               </a:rPr>
               <a:t>عِنْدِي · لَدَيَّ</a:t>
@@ -37711,6 +37955,7 @@
                   <a:srgbClr val="1B3B6F"/>
                 </a:solidFill>
                 <a:latin typeface="Amiri" pitchFamily="2" charset="-78"/>
+                <a:ea typeface="Amiri" pitchFamily="2" charset="-78"/>
                 <a:cs typeface="Amiri" pitchFamily="2" charset="-78"/>
               </a:rPr>
               <a:t>لَيْسَ عِنْدِي</a:t>
@@ -37814,6 +38059,7 @@
                   <a:srgbClr val="1B3B6F"/>
                 </a:solidFill>
                 <a:latin typeface="Amiri" pitchFamily="2" charset="-78"/>
+                <a:ea typeface="Amiri" pitchFamily="2" charset="-78"/>
                 <a:cs typeface="Amiri" pitchFamily="2" charset="-78"/>
               </a:rPr>
               <a:t>لَدَيْهِ · لَدَيْهَا</a:t>
@@ -38079,6 +38325,7 @@
                   <a:srgbClr val="1B3B6F"/>
                 </a:solidFill>
                 <a:latin typeface="Amiri" pitchFamily="2" charset="-78"/>
+                <a:ea typeface="Amiri" pitchFamily="2" charset="-78"/>
                 <a:cs typeface="Amiri" pitchFamily="2" charset="-78"/>
               </a:rPr>
               <a:t>أَحْتَاجُ إِلَى …</a:t>
@@ -38236,6 +38483,7 @@
                   <a:srgbClr val="1B3B6F"/>
                 </a:solidFill>
                 <a:latin typeface="Amiri" pitchFamily="2" charset="-78"/>
+                <a:ea typeface="Amiri" pitchFamily="2" charset="-78"/>
                 <a:cs typeface="Amiri" pitchFamily="2" charset="-78"/>
               </a:rPr>
               <a:t>المَهَارَاتُ الَّتِي أَحْتَاجُ إِلَيْهَا</a:t>
@@ -38339,6 +38587,7 @@
                   <a:srgbClr val="1B3B6F"/>
                 </a:solidFill>
                 <a:latin typeface="Amiri" pitchFamily="2" charset="-78"/>
+                <a:ea typeface="Amiri" pitchFamily="2" charset="-78"/>
                 <a:cs typeface="Amiri" pitchFamily="2" charset="-78"/>
               </a:rPr>
               <a:t>احْتَجْتُ إِلَى</a:t>
@@ -38604,6 +38853,7 @@
                   <a:srgbClr val="1B3B6F"/>
                 </a:solidFill>
                 <a:latin typeface="Amiri" pitchFamily="2" charset="-78"/>
+                <a:ea typeface="Amiri" pitchFamily="2" charset="-78"/>
                 <a:cs typeface="Amiri" pitchFamily="2" charset="-78"/>
               </a:rPr>
               <a:t>بَعْدَ أَنْ …</a:t>
@@ -38761,6 +39011,7 @@
                   <a:srgbClr val="1B3B6F"/>
                 </a:solidFill>
                 <a:latin typeface="Amiri" pitchFamily="2" charset="-78"/>
+                <a:ea typeface="Amiri" pitchFamily="2" charset="-78"/>
                 <a:cs typeface="Amiri" pitchFamily="2" charset="-78"/>
               </a:rPr>
               <a:t>قَبْلَ أَنْ</a:t>
@@ -38864,6 +39115,7 @@
                   <a:srgbClr val="1B3B6F"/>
                 </a:solidFill>
                 <a:latin typeface="Amiri" pitchFamily="2" charset="-78"/>
+                <a:ea typeface="Amiri" pitchFamily="2" charset="-78"/>
                 <a:cs typeface="Amiri" pitchFamily="2" charset="-78"/>
               </a:rPr>
               <a:t>بَعْدَ أَنْ أُنْهِيَ</a:t>
@@ -39129,6 +39381,7 @@
                   <a:srgbClr val="1B3B6F"/>
                 </a:solidFill>
                 <a:latin typeface="Amiri" pitchFamily="2" charset="-78"/>
+                <a:ea typeface="Amiri" pitchFamily="2" charset="-78"/>
                 <a:cs typeface="Amiri" pitchFamily="2" charset="-78"/>
               </a:rPr>
               <a:t>مُؤَهَّلٌ</a:t>
@@ -39286,6 +39539,7 @@
                   <a:srgbClr val="1B3B6F"/>
                 </a:solidFill>
                 <a:latin typeface="Amiri" pitchFamily="2" charset="-78"/>
+                <a:ea typeface="Amiri" pitchFamily="2" charset="-78"/>
                 <a:cs typeface="Amiri" pitchFamily="2" charset="-78"/>
               </a:rPr>
               <a:t>مُؤَهِّلَاتٌ</a:t>
@@ -39389,6 +39643,7 @@
                   <a:srgbClr val="1B3B6F"/>
                 </a:solidFill>
                 <a:latin typeface="Amiri" pitchFamily="2" charset="-78"/>
+                <a:ea typeface="Amiri" pitchFamily="2" charset="-78"/>
                 <a:cs typeface="Amiri" pitchFamily="2" charset="-78"/>
               </a:rPr>
               <a:t>مُؤَهَّلَةٌ</a:t>
@@ -39654,6 +39909,7 @@
                   <a:srgbClr val="1B3B6F"/>
                 </a:solidFill>
                 <a:latin typeface="Amiri" pitchFamily="2" charset="-78"/>
+                <a:ea typeface="Amiri" pitchFamily="2" charset="-78"/>
                 <a:cs typeface="Amiri" pitchFamily="2" charset="-78"/>
               </a:rPr>
               <a:t>مُتَطَوِّعٌ</a:t>
@@ -39811,6 +40067,7 @@
                   <a:srgbClr val="1B3B6F"/>
                 </a:solidFill>
                 <a:latin typeface="Amiri" pitchFamily="2" charset="-78"/>
+                <a:ea typeface="Amiri" pitchFamily="2" charset="-78"/>
                 <a:cs typeface="Amiri" pitchFamily="2" charset="-78"/>
               </a:rPr>
               <a:t>التَّطَوُّعُ</a:t>
@@ -39914,6 +40171,7 @@
                   <a:srgbClr val="1B3B6F"/>
                 </a:solidFill>
                 <a:latin typeface="Amiri" pitchFamily="2" charset="-78"/>
+                <a:ea typeface="Amiri" pitchFamily="2" charset="-78"/>
                 <a:cs typeface="Amiri" pitchFamily="2" charset="-78"/>
               </a:rPr>
               <a:t>مُتَطَوِّعَةٌ</a:t>
@@ -40047,6 +40305,7 @@
                   <a:srgbClr val="D4AF37"/>
                 </a:solidFill>
                 <a:latin typeface="Amiri" pitchFamily="2" charset="-78"/>
+                <a:ea typeface="Amiri" pitchFamily="2" charset="-78"/>
                 <a:cs typeface="Amiri" pitchFamily="2" charset="-78"/>
               </a:rPr>
               <a:t>م</a:t>
@@ -40367,6 +40626,7 @@
                   <a:srgbClr val="8A6D1E"/>
                 </a:solidFill>
                 <a:latin typeface="Amiri" pitchFamily="2" charset="-78"/>
+                <a:ea typeface="Amiri" pitchFamily="2" charset="-78"/>
                 <a:cs typeface="Amiri" pitchFamily="2" charset="-78"/>
               </a:rPr>
               <a:t>فِي الغُرَفِ</a:t>
@@ -41543,6 +41803,7 @@
                   <a:srgbClr val="1B3B6F"/>
                 </a:solidFill>
                 <a:latin typeface="Amiri" pitchFamily="2" charset="-78"/>
+                <a:ea typeface="Amiri" pitchFamily="2" charset="-78"/>
                 <a:cs typeface="Amiri" pitchFamily="2" charset="-78"/>
               </a:rPr>
               <a:t>دَوْرُكَ!</a:t>
@@ -41619,6 +41880,7 @@
                   <a:srgbClr val="1B3B6F"/>
                 </a:solidFill>
                 <a:latin typeface="Amiri" pitchFamily="2" charset="-78"/>
+                <a:ea typeface="Amiri" pitchFamily="2" charset="-78"/>
                 <a:cs typeface="Amiri" pitchFamily="2" charset="-78"/>
               </a:rPr>
               <a:t>أَحْسَنْتَ! / أَحْسَنْتِ!</a:t>
@@ -41695,6 +41957,7 @@
                   <a:srgbClr val="1B3B6F"/>
                 </a:solidFill>
                 <a:latin typeface="Amiri" pitchFamily="2" charset="-78"/>
+                <a:ea typeface="Amiri" pitchFamily="2" charset="-78"/>
                 <a:cs typeface="Amiri" pitchFamily="2" charset="-78"/>
               </a:rPr>
               <a:t>تَكَلَّمْ أَكْثَرَ، مِنْ فَضْلِكَ</a:t>
@@ -41771,6 +42034,7 @@
                   <a:srgbClr val="1B3B6F"/>
                 </a:solidFill>
                 <a:latin typeface="Amiri" pitchFamily="2" charset="-78"/>
+                <a:ea typeface="Amiri" pitchFamily="2" charset="-78"/>
                 <a:cs typeface="Amiri" pitchFamily="2" charset="-78"/>
               </a:rPr>
               <a:t>لِمَاذَا؟</a:t>
@@ -41942,6 +42206,7 @@
                   <a:srgbClr val="D4AF37"/>
                 </a:solidFill>
                 <a:latin typeface="Amiri" pitchFamily="2" charset="-78"/>
+                <a:ea typeface="Amiri" pitchFamily="2" charset="-78"/>
                 <a:cs typeface="Amiri" pitchFamily="2" charset="-78"/>
               </a:rPr>
               <a:t>م</a:t>
@@ -42262,6 +42527,7 @@
                   <a:srgbClr val="8A6D1E"/>
                 </a:solidFill>
                 <a:latin typeface="Amiri" pitchFamily="2" charset="-78"/>
+                <a:ea typeface="Amiri" pitchFamily="2" charset="-78"/>
                 <a:cs typeface="Amiri" pitchFamily="2" charset="-78"/>
               </a:rPr>
               <a:t>دَوْرَةُ الإِنْقَاذِ</a:t>
@@ -42542,6 +42808,7 @@
                   <a:srgbClr val="1B3B6F"/>
                 </a:solidFill>
                 <a:latin typeface="Amiri" pitchFamily="2" charset="-78"/>
+                <a:ea typeface="Amiri" pitchFamily="2" charset="-78"/>
                 <a:cs typeface="Amiri" pitchFamily="2" charset="-78"/>
               </a:rPr>
               <a:t>أُرِيدُ أَنْ أُسَجِّلَ فِي …</a:t>
@@ -42618,6 +42885,7 @@
                   <a:srgbClr val="1B3B6F"/>
                 </a:solidFill>
                 <a:latin typeface="Amiri" pitchFamily="2" charset="-78"/>
+                <a:ea typeface="Amiri" pitchFamily="2" charset="-78"/>
                 <a:cs typeface="Amiri" pitchFamily="2" charset="-78"/>
               </a:rPr>
               <a:t>أَهْلًا! كَيْفَ أُسَاعِدُكَ؟</a:t>
@@ -42786,6 +43054,7 @@
                   <a:srgbClr val="1B3B6F"/>
                 </a:solidFill>
                 <a:latin typeface="Amiri" pitchFamily="2" charset="-78"/>
+                <a:ea typeface="Amiri" pitchFamily="2" charset="-78"/>
                 <a:cs typeface="Amiri" pitchFamily="2" charset="-78"/>
               </a:rPr>
               <a:t>عُمْرِي …</a:t>
@@ -42862,6 +43131,7 @@
                   <a:srgbClr val="1B3B6F"/>
                 </a:solidFill>
                 <a:latin typeface="Amiri" pitchFamily="2" charset="-78"/>
+                <a:ea typeface="Amiri" pitchFamily="2" charset="-78"/>
                 <a:cs typeface="Amiri" pitchFamily="2" charset="-78"/>
               </a:rPr>
               <a:t>كَمْ عُمْرُكَ؟</a:t>
@@ -43030,6 +43300,7 @@
                   <a:srgbClr val="1B3B6F"/>
                 </a:solidFill>
                 <a:latin typeface="Amiri" pitchFamily="2" charset="-78"/>
+                <a:ea typeface="Amiri" pitchFamily="2" charset="-78"/>
                 <a:cs typeface="Amiri" pitchFamily="2" charset="-78"/>
               </a:rPr>
               <a:t>نَعَمْ، عِنْدِي شَهَادَةٌ فِي …</a:t>
@@ -43106,6 +43377,7 @@
                   <a:srgbClr val="1B3B6F"/>
                 </a:solidFill>
                 <a:latin typeface="Amiri" pitchFamily="2" charset="-78"/>
+                <a:ea typeface="Amiri" pitchFamily="2" charset="-78"/>
                 <a:cs typeface="Amiri" pitchFamily="2" charset="-78"/>
               </a:rPr>
               <a:t>هَلْ تَسْبَحُ جَيِّدًا؟</a:t>
@@ -43274,6 +43546,7 @@
                   <a:srgbClr val="1B3B6F"/>
                 </a:solidFill>
                 <a:latin typeface="Amiri" pitchFamily="2" charset="-78"/>
+                <a:ea typeface="Amiri" pitchFamily="2" charset="-78"/>
                 <a:cs typeface="Amiri" pitchFamily="2" charset="-78"/>
               </a:rPr>
               <a:t>كَمْ أُسْبُوعًا …؟</a:t>
@@ -43350,6 +43623,7 @@
                   <a:srgbClr val="1B3B6F"/>
                 </a:solidFill>
                 <a:latin typeface="Amiri" pitchFamily="2" charset="-78"/>
+                <a:ea typeface="Amiri" pitchFamily="2" charset="-78"/>
                 <a:cs typeface="Amiri" pitchFamily="2" charset="-78"/>
               </a:rPr>
               <a:t>الدَّوْرَةُ يَوْمَ السَّبْتِ.</a:t>
@@ -43518,6 +43792,7 @@
                   <a:srgbClr val="1B3B6F"/>
                 </a:solidFill>
                 <a:latin typeface="Amiri" pitchFamily="2" charset="-78"/>
+                <a:ea typeface="Amiri" pitchFamily="2" charset="-78"/>
                 <a:cs typeface="Amiri" pitchFamily="2" charset="-78"/>
               </a:rPr>
               <a:t>لِأَنِّي أُرِيدُ أَنْ أَعْمَلَ …</a:t>
@@ -43594,6 +43869,7 @@
                   <a:srgbClr val="1B3B6F"/>
                 </a:solidFill>
                 <a:latin typeface="Amiri" pitchFamily="2" charset="-78"/>
+                <a:ea typeface="Amiri" pitchFamily="2" charset="-78"/>
                 <a:cs typeface="Amiri" pitchFamily="2" charset="-78"/>
               </a:rPr>
               <a:t>لِمَاذَا تُرِيدُ هٰذِهِ الدَّوْرَةَ؟</a:t>
@@ -43868,6 +44144,7 @@
                   <a:srgbClr val="D4AF37"/>
                 </a:solidFill>
                 <a:latin typeface="Amiri" pitchFamily="2" charset="-78"/>
+                <a:ea typeface="Amiri" pitchFamily="2" charset="-78"/>
                 <a:cs typeface="Amiri" pitchFamily="2" charset="-78"/>
               </a:rPr>
               <a:t>م</a:t>
@@ -44188,6 +44465,7 @@
                   <a:srgbClr val="8A6D1E"/>
                 </a:solidFill>
                 <a:latin typeface="Amiri" pitchFamily="2" charset="-78"/>
+                <a:ea typeface="Amiri" pitchFamily="2" charset="-78"/>
                 <a:cs typeface="Amiri" pitchFamily="2" charset="-78"/>
               </a:rPr>
               <a:t>فِي مَعْرِضِ المِهَنِ</a:t>
@@ -44468,6 +44746,7 @@
                   <a:srgbClr val="1B3B6F"/>
                 </a:solidFill>
                 <a:latin typeface="Amiri" pitchFamily="2" charset="-78"/>
+                <a:ea typeface="Amiri" pitchFamily="2" charset="-78"/>
                 <a:cs typeface="Amiri" pitchFamily="2" charset="-78"/>
               </a:rPr>
               <a:t>بَعْدَ أَنْ أُنْهِيَ المَدْرَسَةَ، سَأَدْرُسُ …</a:t>
@@ -44544,6 +44823,7 @@
                   <a:srgbClr val="1B3B6F"/>
                 </a:solidFill>
                 <a:latin typeface="Amiri" pitchFamily="2" charset="-78"/>
+                <a:ea typeface="Amiri" pitchFamily="2" charset="-78"/>
                 <a:cs typeface="Amiri" pitchFamily="2" charset="-78"/>
               </a:rPr>
               <a:t>مَاذَا سَتَفْعَلُ بَعْدَ المَدْرَسَةِ؟</a:t>
@@ -44712,6 +44992,7 @@
                   <a:srgbClr val="1B3B6F"/>
                 </a:solidFill>
                 <a:latin typeface="Amiri" pitchFamily="2" charset="-78"/>
+                <a:ea typeface="Amiri" pitchFamily="2" charset="-78"/>
                 <a:cs typeface="Amiri" pitchFamily="2" charset="-78"/>
               </a:rPr>
               <a:t>يُعْجِبُنِي … لِأَنَّ …</a:t>
@@ -44788,6 +45069,7 @@
                   <a:srgbClr val="1B3B6F"/>
                 </a:solidFill>
                 <a:latin typeface="Amiri" pitchFamily="2" charset="-78"/>
+                <a:ea typeface="Amiri" pitchFamily="2" charset="-78"/>
                 <a:cs typeface="Amiri" pitchFamily="2" charset="-78"/>
               </a:rPr>
               <a:t>أَيَّ مَجَالٍ يُعْجِبُكَ؟</a:t>
@@ -44956,6 +45238,7 @@
                   <a:srgbClr val="1B3B6F"/>
                 </a:solidFill>
                 <a:latin typeface="Amiri" pitchFamily="2" charset="-78"/>
+                <a:ea typeface="Amiri" pitchFamily="2" charset="-78"/>
                 <a:cs typeface="Amiri" pitchFamily="2" charset="-78"/>
               </a:rPr>
               <a:t>هَلْ تَشْمَلُ … ؟</a:t>
@@ -45032,6 +45315,7 @@
                   <a:srgbClr val="1B3B6F"/>
                 </a:solidFill>
                 <a:latin typeface="Amiri" pitchFamily="2" charset="-78"/>
+                <a:ea typeface="Amiri" pitchFamily="2" charset="-78"/>
                 <a:cs typeface="Amiri" pitchFamily="2" charset="-78"/>
               </a:rPr>
               <a:t>عِنْدَنَا دَوْرَةٌ لِلطُّهَاةِ لِمُدَّةِ سَنَتَيْنِ.</a:t>
@@ -45135,6 +45419,7 @@
                   <a:srgbClr val="1B3B6F"/>
                 </a:solidFill>
                 <a:latin typeface="Amiri" pitchFamily="2" charset="-78"/>
+                <a:ea typeface="Amiri" pitchFamily="2" charset="-78"/>
                 <a:cs typeface="Amiri" pitchFamily="2" charset="-78"/>
               </a:rPr>
               <a:t>لَدَيَّ مَهَارَةُ … لِأَنِّي …</a:t>
@@ -45211,6 +45496,7 @@
                   <a:srgbClr val="1B3B6F"/>
                 </a:solidFill>
                 <a:latin typeface="Amiri" pitchFamily="2" charset="-78"/>
+                <a:ea typeface="Amiri" pitchFamily="2" charset="-78"/>
                 <a:cs typeface="Amiri" pitchFamily="2" charset="-78"/>
               </a:rPr>
               <a:t>نَعَمْ، ثَلَاثَةَ أَشْهُرٍ فِي فُنْدُقٍ. مَا مَهَارَاتُكَ؟</a:t>
@@ -45314,6 +45600,7 @@
                   <a:srgbClr val="1B3B6F"/>
                 </a:solidFill>
                 <a:latin typeface="Amiri" pitchFamily="2" charset="-78"/>
+                <a:ea typeface="Amiri" pitchFamily="2" charset="-78"/>
                 <a:cs typeface="Amiri" pitchFamily="2" charset="-78"/>
               </a:rPr>
               <a:t>نَعَمْ، عَمِلْتُ فِي … حَيْثُ …</a:t>
@@ -45390,6 +45677,7 @@
                   <a:srgbClr val="1B3B6F"/>
                 </a:solidFill>
                 <a:latin typeface="Amiri" pitchFamily="2" charset="-78"/>
+                <a:ea typeface="Amiri" pitchFamily="2" charset="-78"/>
                 <a:cs typeface="Amiri" pitchFamily="2" charset="-78"/>
               </a:rPr>
               <a:t>هَلْ عِنْدَكَ خِبْرَةُ عَمَلٍ؟</a:t>
@@ -45564,13 +45852,9 @@
     <a:fontScheme name="Office">
       <a:majorFont>
         <a:latin typeface="Calibri Light" panose="020F0302020204030204"/>
-        <a:ea typeface=""/>
-        <a:cs typeface=""/>
-        <a:font script="Jpan" typeface="游ゴシック Light"/>
-        <a:font script="Hang" typeface="맑은 고딕"/>
-        <a:font script="Hans" typeface="等线 Light"/>
-        <a:font script="Hant" typeface="新細明體"/>
-        <a:font script="Arab" typeface="Times New Roman"/>
+        <a:ea typeface="Amiri" pitchFamily="2" charset="-78"/>
+        <a:cs typeface="Amiri" pitchFamily="2" charset="-78"/>
+        <a:font script="Arab" typeface="Amiri"/>
         <a:font script="Hebr" typeface="Times New Roman"/>
         <a:font script="Thai" typeface="Angsana New"/>
         <a:font script="Ethi" typeface="Nyala"/>
@@ -45616,13 +45900,9 @@
       </a:majorFont>
       <a:minorFont>
         <a:latin typeface="Calibri" panose="020F0502020204030204"/>
-        <a:ea typeface=""/>
-        <a:cs typeface=""/>
-        <a:font script="Jpan" typeface="游ゴシック"/>
-        <a:font script="Hang" typeface="맑은 고딕"/>
-        <a:font script="Hans" typeface="等线"/>
-        <a:font script="Hant" typeface="新細明體"/>
-        <a:font script="Arab" typeface="Arial"/>
+        <a:ea typeface="Amiri" pitchFamily="2" charset="-78"/>
+        <a:cs typeface="Amiri" pitchFamily="2" charset="-78"/>
+        <a:font script="Arab" typeface="Amiri"/>
         <a:font script="Hebr" typeface="Arial"/>
         <a:font script="Thai" typeface="Cordia New"/>
         <a:font script="Ethi" typeface="Nyala"/>
